--- a/lecons/F2T/23_S17_L5_P4_Secondary_Sector.pptx
+++ b/lecons/F2T/23_S17_L5_P4_Secondary_Sector.pptx
@@ -53,9 +53,12 @@
     <p:sldId id="301" r:id="rId47"/>
     <p:sldId id="302" r:id="rId48"/>
     <p:sldId id="303" r:id="rId49"/>
+    <p:sldId id="304" r:id="rId50"/>
+    <p:sldId id="305" r:id="rId51"/>
+    <p:sldId id="306" r:id="rId52"/>
   </p:sldIdLst>
   <p:notesMasterIdLst>
-    <p:notesMasterId r:id="rId50"/>
+    <p:notesMasterId r:id="rId53"/>
   </p:notesMasterIdLst>
   <p:sldSz cx="12192000" cy="6858000"/>
   <p:notesSz cx="6858000" cy="12192000"/>
@@ -725,7 +728,7 @@
           <a:p>
             <a:r>
               <a:rPr lang="en-US" dirty="0"/>
-              <a:t>Good. Cameroon sells raw products cheaply and buys finished goods at high prices.</a:t>
+              <a:t>Good. Djibrilla does not know the sector that transforms raw materials.</a:t>
             </a:r>
             <a:endParaRPr lang="en-US" dirty="0"/>
           </a:p>
@@ -813,7 +816,7 @@
           <a:p>
             <a:r>
               <a:rPr lang="en-US" dirty="0"/>
-              <a:t>Question 2: What are clothes and chocolate made from? Think for a moment, then raise your hand to answer.</a:t>
+              <a:t>Question 2: What does Cameroon sell? Think for a moment, then raise your hand to answer.</a:t>
             </a:r>
             <a:endParaRPr lang="en-US" dirty="0"/>
           </a:p>
@@ -901,7 +904,7 @@
           <a:p>
             <a:r>
               <a:rPr lang="en-US" dirty="0"/>
-              <a:t>Good. Cotton and cocoa.</a:t>
+              <a:t>Good. Raw cotton and cocoa beans.</a:t>
             </a:r>
             <a:endParaRPr lang="en-US" dirty="0"/>
           </a:p>
@@ -989,7 +992,7 @@
           <a:p>
             <a:r>
               <a:rPr lang="en-US" dirty="0"/>
-              <a:t>Question 3: What can Cameroon do? Think for a moment, then raise your hand to answer.</a:t>
+              <a:t>Question 3: What does it buy back? Think for a moment, then raise your hand to answer.</a:t>
             </a:r>
             <a:endParaRPr lang="en-US" dirty="0"/>
           </a:p>
@@ -1077,7 +1080,7 @@
           <a:p>
             <a:r>
               <a:rPr lang="en-US" dirty="0"/>
-              <a:t>Good. Build more factories to make the goods here.</a:t>
+              <a:t>Good. Clothes and chocolate.</a:t>
             </a:r>
             <a:endParaRPr lang="en-US" dirty="0"/>
           </a:p>
@@ -1341,7 +1344,7 @@
           <a:p>
             <a:r>
               <a:rPr lang="en-US" dirty="0"/>
-              <a:t>Activity 1. Look carefully at this picture: machines that weave cloth in a factory. Observe every detail before I ask the question.</a:t>
+              <a:t>Activity 1. Look carefully at this picture: a textile factory. Observe every detail before I ask the question.</a:t>
             </a:r>
             <a:endParaRPr lang="en-US" dirty="0"/>
           </a:p>
@@ -1693,7 +1696,7 @@
           <a:p>
             <a:r>
               <a:rPr lang="en-US" dirty="0"/>
-              <a:t>Activity 2. Look carefully at this picture: machines fill bottles in a drinks factory. Observe every detail before I ask the question.</a:t>
+              <a:t>Activity 2. Look carefully at this picture: a drinks factory. Observe every detail before I ask the question.</a:t>
             </a:r>
             <a:endParaRPr lang="en-US" dirty="0"/>
           </a:p>
@@ -1781,7 +1784,7 @@
           <a:p>
             <a:r>
               <a:rPr lang="en-US" dirty="0"/>
-              <a:t>Here is the question for Activity 2: Name two factories of North Cameroon and what they make. Take one minute to think and write your answer in your rough notebook.</a:t>
+              <a:t>Here is the question for Activity 2: Name one factory of North Cameroon. Take one minute to think and write your answer in your rough notebook.</a:t>
             </a:r>
             <a:endParaRPr lang="en-US" dirty="0"/>
           </a:p>
@@ -1869,7 +1872,7 @@
           <a:p>
             <a:r>
               <a:rPr lang="en-US" dirty="0"/>
-              <a:t>Let us check the answer together. CICAM (cloth) and SODECOTON (cotton oil). Also drinks factories.</a:t>
+              <a:t>Let us check the answer together. CICAM (cloth) or SODECOTON (cotton oil).</a:t>
             </a:r>
             <a:endParaRPr lang="en-US" dirty="0"/>
           </a:p>
@@ -1957,7 +1960,7 @@
           <a:p>
             <a:r>
               <a:rPr lang="en-US" dirty="0"/>
-              <a:t>Activity 3. Look carefully at this picture: an aluminium factory seen from the sky. Observe every detail before I ask the question.</a:t>
+              <a:t>Activity 3. Look carefully at this picture: an aluminium factory. Observe every detail before I ask the question.</a:t>
             </a:r>
             <a:endParaRPr lang="en-US" dirty="0"/>
           </a:p>
@@ -2045,7 +2048,7 @@
           <a:p>
             <a:r>
               <a:rPr lang="en-US" dirty="0"/>
-              <a:t>Here is the question for Activity 3: Alucam at Edéa makes aluminium. What type of industry is this? Take one minute to think and write your answer in your rough notebook.</a:t>
+              <a:t>Here is the question for Activity 3: What does Alucam in Edéa make? Take one minute to think and write your answer in your rough notebook.</a:t>
             </a:r>
             <a:endParaRPr lang="en-US" dirty="0"/>
           </a:p>
@@ -2133,7 +2136,7 @@
           <a:p>
             <a:r>
               <a:rPr lang="en-US" dirty="0"/>
-              <a:t>Let us check the answer together. A heavy industry: it transforms minerals.</a:t>
+              <a:t>Let us check the answer together. Aluminium.</a:t>
             </a:r>
             <a:endParaRPr lang="en-US" dirty="0"/>
           </a:p>
@@ -2221,7 +2224,7 @@
           <a:p>
             <a:r>
               <a:rPr lang="en-US" dirty="0"/>
-              <a:t>Activity 4. Look carefully at this picture: workers build a house. Observe every detail before I ask the question.</a:t>
+              <a:t>Activity 4. Look carefully at this picture: builders at work. Observe every detail before I ask the question.</a:t>
             </a:r>
             <a:endParaRPr lang="en-US" dirty="0"/>
           </a:p>
@@ -2309,7 +2312,7 @@
           <a:p>
             <a:r>
               <a:rPr lang="en-US" dirty="0"/>
-              <a:t>Here is the question for Activity 4: Is building houses and roads part of the secondary sector? Why? Take one minute to think and write your answer in your rough notebook.</a:t>
+              <a:t>Here is the question for Activity 4: Is building houses part of the secondary sector? Take one minute to think and write your answer in your rough notebook.</a:t>
             </a:r>
             <a:endParaRPr lang="en-US" dirty="0"/>
           </a:p>
@@ -2397,7 +2400,7 @@
           <a:p>
             <a:r>
               <a:rPr lang="en-US" dirty="0"/>
-              <a:t>Let us check the answer together. Yes. Builders make new things from sand, cement and iron.</a:t>
+              <a:t>Let us check the answer together. Yes: builders make new things from cement, sand and iron.</a:t>
             </a:r>
             <a:endParaRPr lang="en-US" dirty="0"/>
           </a:p>
@@ -2573,7 +2576,7 @@
           <a:p>
             <a:r>
               <a:rPr lang="en-US" dirty="0"/>
-              <a:t>Activity 5. Look carefully at this picture: a blacksmith makes tools. Observe every detail before I ask the question.</a:t>
+              <a:t>Activity 5. Look carefully at this picture: a blacksmith. Observe every detail before I ask the question.</a:t>
             </a:r>
             <a:endParaRPr lang="en-US" dirty="0"/>
           </a:p>
@@ -2661,7 +2664,7 @@
           <a:p>
             <a:r>
               <a:rPr lang="en-US" dirty="0"/>
-              <a:t>Here is the question for Activity 5: The blacksmith makes tools by hand. What do we call this work? Take one minute to think and write your answer in your rough notebook.</a:t>
+              <a:t>Here is the question for Activity 5: What do we call making tools by hand? Take one minute to think and write your answer in your rough notebook.</a:t>
             </a:r>
             <a:endParaRPr lang="en-US" dirty="0"/>
           </a:p>
@@ -2925,7 +2928,7 @@
           <a:p>
             <a:r>
               <a:rPr lang="en-US" dirty="0"/>
-              <a:t>Let us copy Meaning of the Secondary Sector. The secondary sector is defined as follows. On this slide we have Secondary sector and Industry and craft. Write each point on a new line, with the key term first, and explain it in your own words when we revise.</a:t>
+              <a:t>Let us copy the definitions. The key terms of this lesson are defined as follows. On this slide we have Secondary sector and Industry. Write each point on a new line, with the key term first, and explain it in your own words when we revise.</a:t>
             </a:r>
             <a:endParaRPr lang="en-US" dirty="0"/>
           </a:p>
@@ -3013,7 +3016,7 @@
           <a:p>
             <a:r>
               <a:rPr lang="en-US" dirty="0"/>
-              <a:t>Let us copy Examples of the Secondary Sector. The secondary sector in Cameroon includes the following activities. On this slide we have Agro-industries and Heavy industries. Write each point on a new line, with the key term first, and explain it in your own words when we revise. When you finish, we go to the next slide.</a:t>
+              <a:t>Let us copy Examples of Secondary Activities. The secondary sector includes the following activities. Copy the point on Light industries on the left, then draw the diagram on the right: a textile factory. Give it a title and label it clearly.</a:t>
             </a:r>
             <a:endParaRPr lang="en-US" dirty="0"/>
           </a:p>
@@ -3101,7 +3104,7 @@
           <a:p>
             <a:r>
               <a:rPr lang="en-US" dirty="0"/>
-              <a:t>We continue with Examples of the Secondary Sector. On this slide we have Construction, Energy and Crafts. Write each point on a new line, with the key term first, and explain it in your own words when we revise.</a:t>
+              <a:t>Copy the point on Heavy industries on the left, then draw the diagram on the right: an aluminium factory. Give it a title and label it clearly.</a:t>
             </a:r>
             <a:endParaRPr lang="en-US" dirty="0"/>
           </a:p>
@@ -3189,7 +3192,7 @@
           <a:p>
             <a:r>
               <a:rPr lang="en-US" dirty="0"/>
-              <a:t>Now let us check what you have understood. Question 1: What is the secondary sector? Answer in your exercise book.</a:t>
+              <a:t>We continue with Examples of Secondary Activities. On this slide we have Building and public works. Write each point on a new line, with the key term first, and explain it in your own words when we revise.</a:t>
             </a:r>
             <a:endParaRPr lang="en-US" dirty="0"/>
           </a:p>
@@ -3277,7 +3280,7 @@
           <a:p>
             <a:r>
               <a:rPr lang="en-US" dirty="0"/>
-              <a:t>The expected answer is: the sector that turns raw materials into goods. If you got it right, well done.</a:t>
+              <a:t>Copy the point on Crafts on the left, then draw the diagram on the right: a blacksmith. Give it a title and label it clearly.</a:t>
             </a:r>
             <a:endParaRPr lang="en-US" dirty="0"/>
           </a:p>
@@ -3365,7 +3368,7 @@
           <a:p>
             <a:r>
               <a:rPr lang="en-US" dirty="0"/>
-              <a:t>Now let us check what you have understood. Question 2: Give two examples of industries in Cameroon. Answer in your exercise book.</a:t>
+              <a:t>We continue with Examples of Secondary Activities. On this slide we have Energy production. Write each point on a new line, with the key term first, and explain it in your own words when we revise.</a:t>
             </a:r>
             <a:endParaRPr lang="en-US" dirty="0"/>
           </a:p>
@@ -3541,7 +3544,7 @@
           <a:p>
             <a:r>
               <a:rPr lang="en-US" dirty="0"/>
-              <a:t>The expected answer is: cICAM (cloth) and Alucam (aluminium). If you got it right, well done.</a:t>
+              <a:t>Now let us check what you have understood. Question 1: What is the secondary sector? Answer in your exercise book.</a:t>
             </a:r>
             <a:endParaRPr lang="en-US" dirty="0"/>
           </a:p>
@@ -3629,7 +3632,7 @@
           <a:p>
             <a:r>
               <a:rPr lang="en-US" dirty="0"/>
-              <a:t>For those who need more practice, fill in the blanks in your exercise book. The answers are: number 1, secondary; number 2, cloth; number 3, aluminium.</a:t>
+              <a:t>The expected answer is: the sector that turns raw materials into goods. If you got it right, well done.</a:t>
             </a:r>
             <a:endParaRPr lang="en-US" dirty="0"/>
           </a:p>
@@ -3717,7 +3720,7 @@
           <a:p>
             <a:r>
               <a:rPr lang="en-US" dirty="0"/>
-              <a:t>For your homework: List four services that your family uses every week, for example transport, school, hospital, market or mobile money. We shall correct it at the beginning of our next lesson.</a:t>
+              <a:t>Now let us check what you have understood. Question 2: Give two examples of industries in Cameroon. Answer in your exercise book.</a:t>
             </a:r>
             <a:endParaRPr lang="en-US" dirty="0"/>
           </a:p>
@@ -3805,7 +3808,7 @@
           <a:p>
             <a:r>
               <a:rPr lang="en-US" dirty="0"/>
-              <a:t>Our next lesson will be on Lesson 5 (Part 5): The Sectors of the Economy: The Tertiary Sector (Definition and Examples). Thank you for your attention, and see you next time.</a:t>
+              <a:t>The expected answer is: cICAM (cloth) and Alucam (aluminium). If you got it right, well done.</a:t>
             </a:r>
             <a:endParaRPr lang="en-US" dirty="0"/>
           </a:p>
@@ -3893,7 +3896,7 @@
           <a:p>
             <a:r>
               <a:rPr lang="en-US" dirty="0"/>
-              <a:t>Let us play the bilingual game. I say a word in English, and you give me the French word. Then we do the reverse.</a:t>
+              <a:t>For those who need more practice, fill in the blanks in your exercise book. The answers are: number 1, secondary; number 2, cloth; number 3, aluminium.</a:t>
             </a:r>
             <a:endParaRPr lang="en-US" dirty="0"/>
           </a:p>
@@ -3981,7 +3984,7 @@
           <a:p>
             <a:r>
               <a:rPr lang="en-US" dirty="0"/>
-              <a:t>I record this information in the official logbook of the class after the lesson.</a:t>
+              <a:t>For your homework: List four services that your family uses every week, for example transport, school, hospital, market or mobile money. We shall correct it at the beginning of our next lesson.</a:t>
             </a:r>
             <a:endParaRPr lang="en-US" dirty="0"/>
           </a:p>
@@ -4069,7 +4072,7 @@
           <a:p>
             <a:r>
               <a:rPr lang="en-US" dirty="0"/>
-              <a:t>I complete the second page of the logbook: the matter taught, the evaluation, the homework and the attendance.</a:t>
+              <a:t>Our next lesson will be on Lesson 5 (Part 5): The Sectors of the Economy: The Tertiary Sector (Definition and Examples). Thank you for your attention, and see you next time.</a:t>
             </a:r>
             <a:endParaRPr lang="en-US" dirty="0"/>
           </a:p>
@@ -4157,7 +4160,7 @@
           <a:p>
             <a:r>
               <a:rPr lang="en-US" dirty="0"/>
-              <a:t>This slide is for me, the teacher: it gives the timing of the lesson and what to do if the projector is not available.</a:t>
+              <a:t>Let us play the bilingual game. I say a word in English, and you give me the French word. Then we do the reverse.</a:t>
             </a:r>
             <a:endParaRPr lang="en-US" dirty="0"/>
           </a:p>
@@ -4245,7 +4248,7 @@
           <a:p>
             <a:r>
               <a:rPr lang="en-US" dirty="0"/>
-              <a:t>These are the references and picture credits used to prepare this lesson.</a:t>
+              <a:t>I record this information in the official logbook of the class after the lesson.</a:t>
             </a:r>
             <a:endParaRPr lang="en-US" dirty="0"/>
           </a:p>
@@ -4269,6 +4272,94 @@
             <a:fld id="{F7021451-1387-4CA6-816F-3879F97B5CBC}" type="slidenum">
               <a:rPr lang="en-US"/>
               <a:t>48</a:t>
+            </a:fld>
+            <a:endParaRPr lang="en-US"/>
+          </a:p>
+        </p:txBody>
+      </p:sp>
+    </p:spTree>
+    <p:extLst>
+      <p:ext uri="{BB962C8B-B14F-4D97-AF65-F5344CB8AC3E}">
+        <p14:creationId xmlns:p14="http://schemas.microsoft.com/office/powerpoint/2010/main" val="1024086991"/>
+      </p:ext>
+    </p:extLst>
+  </p:cSld>
+  <p:clrMapOvr>
+    <a:masterClrMapping/>
+  </p:clrMapOvr>
+</p:notes>
+</file>
+
+<file path=ppt/notesSlides/notesSlide49.xml><?xml version="1.0" encoding="utf-8"?>
+<p:notes xmlns:a="http://schemas.openxmlformats.org/drawingml/2006/main" xmlns:r="http://schemas.openxmlformats.org/officeDocument/2006/relationships" xmlns:p="http://schemas.openxmlformats.org/presentationml/2006/main">
+  <p:cSld>
+    <p:spTree>
+      <p:nvGrpSpPr>
+        <p:cNvPr id="1" name=""/>
+        <p:cNvGrpSpPr/>
+        <p:nvPr/>
+      </p:nvGrpSpPr>
+      <p:grpSpPr>
+        <a:xfrm>
+          <a:off x="0" y="0"/>
+          <a:ext cx="0" cy="0"/>
+          <a:chOff x="0" y="0"/>
+          <a:chExt cx="0" cy="0"/>
+        </a:xfrm>
+      </p:grpSpPr>
+      <p:sp>
+        <p:nvSpPr>
+          <p:cNvPr id="2" name="Slide Image Placeholder 1"/>
+          <p:cNvSpPr>
+            <a:spLocks noGrp="1" noRot="1" noChangeAspect="1"/>
+          </p:cNvSpPr>
+          <p:nvPr>
+            <p:ph type="sldImg"/>
+          </p:nvPr>
+        </p:nvSpPr>
+        <p:spPr/>
+      </p:sp>
+      <p:sp>
+        <p:nvSpPr>
+          <p:cNvPr id="3" name="Notes Placeholder 2"/>
+          <p:cNvSpPr>
+            <a:spLocks noGrp="1"/>
+          </p:cNvSpPr>
+          <p:nvPr>
+            <p:ph type="body" idx="1"/>
+          </p:nvPr>
+        </p:nvSpPr>
+        <p:spPr/>
+        <p:txBody>
+          <a:bodyPr/>
+          <a:lstStyle/>
+          <a:p>
+            <a:r>
+              <a:rPr lang="en-US" dirty="0"/>
+              <a:t>I complete the second page of the logbook: the matter taught, the evaluation, the homework and the attendance.</a:t>
+            </a:r>
+            <a:endParaRPr lang="en-US" dirty="0"/>
+          </a:p>
+        </p:txBody>
+      </p:sp>
+      <p:sp>
+        <p:nvSpPr>
+          <p:cNvPr id="4" name="Slide Number Placeholder 3"/>
+          <p:cNvSpPr>
+            <a:spLocks noGrp="1"/>
+          </p:cNvSpPr>
+          <p:nvPr>
+            <p:ph type="sldNum" sz="quarter" idx="10"/>
+          </p:nvPr>
+        </p:nvSpPr>
+        <p:spPr/>
+        <p:txBody>
+          <a:bodyPr/>
+          <a:lstStyle/>
+          <a:p>
+            <a:fld id="{F7021451-1387-4CA6-816F-3879F97B5CBC}" type="slidenum">
+              <a:rPr lang="en-US"/>
+              <a:t>49</a:t>
             </a:fld>
             <a:endParaRPr lang="en-US"/>
           </a:p>
@@ -4375,6 +4466,182 @@
 </p:notes>
 </file>
 
+<file path=ppt/notesSlides/notesSlide50.xml><?xml version="1.0" encoding="utf-8"?>
+<p:notes xmlns:a="http://schemas.openxmlformats.org/drawingml/2006/main" xmlns:r="http://schemas.openxmlformats.org/officeDocument/2006/relationships" xmlns:p="http://schemas.openxmlformats.org/presentationml/2006/main">
+  <p:cSld>
+    <p:spTree>
+      <p:nvGrpSpPr>
+        <p:cNvPr id="1" name=""/>
+        <p:cNvGrpSpPr/>
+        <p:nvPr/>
+      </p:nvGrpSpPr>
+      <p:grpSpPr>
+        <a:xfrm>
+          <a:off x="0" y="0"/>
+          <a:ext cx="0" cy="0"/>
+          <a:chOff x="0" y="0"/>
+          <a:chExt cx="0" cy="0"/>
+        </a:xfrm>
+      </p:grpSpPr>
+      <p:sp>
+        <p:nvSpPr>
+          <p:cNvPr id="2" name="Slide Image Placeholder 1"/>
+          <p:cNvSpPr>
+            <a:spLocks noGrp="1" noRot="1" noChangeAspect="1"/>
+          </p:cNvSpPr>
+          <p:nvPr>
+            <p:ph type="sldImg"/>
+          </p:nvPr>
+        </p:nvSpPr>
+        <p:spPr/>
+      </p:sp>
+      <p:sp>
+        <p:nvSpPr>
+          <p:cNvPr id="3" name="Notes Placeholder 2"/>
+          <p:cNvSpPr>
+            <a:spLocks noGrp="1"/>
+          </p:cNvSpPr>
+          <p:nvPr>
+            <p:ph type="body" idx="1"/>
+          </p:nvPr>
+        </p:nvSpPr>
+        <p:spPr/>
+        <p:txBody>
+          <a:bodyPr/>
+          <a:lstStyle/>
+          <a:p>
+            <a:r>
+              <a:rPr lang="en-US" dirty="0"/>
+              <a:t>This slide is for me, the teacher: it gives the timing of the lesson and what to do if the projector is not available.</a:t>
+            </a:r>
+            <a:endParaRPr lang="en-US" dirty="0"/>
+          </a:p>
+        </p:txBody>
+      </p:sp>
+      <p:sp>
+        <p:nvSpPr>
+          <p:cNvPr id="4" name="Slide Number Placeholder 3"/>
+          <p:cNvSpPr>
+            <a:spLocks noGrp="1"/>
+          </p:cNvSpPr>
+          <p:nvPr>
+            <p:ph type="sldNum" sz="quarter" idx="10"/>
+          </p:nvPr>
+        </p:nvSpPr>
+        <p:spPr/>
+        <p:txBody>
+          <a:bodyPr/>
+          <a:lstStyle/>
+          <a:p>
+            <a:fld id="{F7021451-1387-4CA6-816F-3879F97B5CBC}" type="slidenum">
+              <a:rPr lang="en-US"/>
+              <a:t>50</a:t>
+            </a:fld>
+            <a:endParaRPr lang="en-US"/>
+          </a:p>
+        </p:txBody>
+      </p:sp>
+    </p:spTree>
+    <p:extLst>
+      <p:ext uri="{BB962C8B-B14F-4D97-AF65-F5344CB8AC3E}">
+        <p14:creationId xmlns:p14="http://schemas.microsoft.com/office/powerpoint/2010/main" val="1024086991"/>
+      </p:ext>
+    </p:extLst>
+  </p:cSld>
+  <p:clrMapOvr>
+    <a:masterClrMapping/>
+  </p:clrMapOvr>
+</p:notes>
+</file>
+
+<file path=ppt/notesSlides/notesSlide51.xml><?xml version="1.0" encoding="utf-8"?>
+<p:notes xmlns:a="http://schemas.openxmlformats.org/drawingml/2006/main" xmlns:r="http://schemas.openxmlformats.org/officeDocument/2006/relationships" xmlns:p="http://schemas.openxmlformats.org/presentationml/2006/main">
+  <p:cSld>
+    <p:spTree>
+      <p:nvGrpSpPr>
+        <p:cNvPr id="1" name=""/>
+        <p:cNvGrpSpPr/>
+        <p:nvPr/>
+      </p:nvGrpSpPr>
+      <p:grpSpPr>
+        <a:xfrm>
+          <a:off x="0" y="0"/>
+          <a:ext cx="0" cy="0"/>
+          <a:chOff x="0" y="0"/>
+          <a:chExt cx="0" cy="0"/>
+        </a:xfrm>
+      </p:grpSpPr>
+      <p:sp>
+        <p:nvSpPr>
+          <p:cNvPr id="2" name="Slide Image Placeholder 1"/>
+          <p:cNvSpPr>
+            <a:spLocks noGrp="1" noRot="1" noChangeAspect="1"/>
+          </p:cNvSpPr>
+          <p:nvPr>
+            <p:ph type="sldImg"/>
+          </p:nvPr>
+        </p:nvSpPr>
+        <p:spPr/>
+      </p:sp>
+      <p:sp>
+        <p:nvSpPr>
+          <p:cNvPr id="3" name="Notes Placeholder 2"/>
+          <p:cNvSpPr>
+            <a:spLocks noGrp="1"/>
+          </p:cNvSpPr>
+          <p:nvPr>
+            <p:ph type="body" idx="1"/>
+          </p:nvPr>
+        </p:nvSpPr>
+        <p:spPr/>
+        <p:txBody>
+          <a:bodyPr/>
+          <a:lstStyle/>
+          <a:p>
+            <a:r>
+              <a:rPr lang="en-US" dirty="0"/>
+              <a:t>These are the references and picture credits used to prepare this lesson.</a:t>
+            </a:r>
+            <a:endParaRPr lang="en-US" dirty="0"/>
+          </a:p>
+        </p:txBody>
+      </p:sp>
+      <p:sp>
+        <p:nvSpPr>
+          <p:cNvPr id="4" name="Slide Number Placeholder 3"/>
+          <p:cNvSpPr>
+            <a:spLocks noGrp="1"/>
+          </p:cNvSpPr>
+          <p:nvPr>
+            <p:ph type="sldNum" sz="quarter" idx="10"/>
+          </p:nvPr>
+        </p:nvSpPr>
+        <p:spPr/>
+        <p:txBody>
+          <a:bodyPr/>
+          <a:lstStyle/>
+          <a:p>
+            <a:fld id="{F7021451-1387-4CA6-816F-3879F97B5CBC}" type="slidenum">
+              <a:rPr lang="en-US"/>
+              <a:t>51</a:t>
+            </a:fld>
+            <a:endParaRPr lang="en-US"/>
+          </a:p>
+        </p:txBody>
+      </p:sp>
+    </p:spTree>
+    <p:extLst>
+      <p:ext uri="{BB962C8B-B14F-4D97-AF65-F5344CB8AC3E}">
+        <p14:creationId xmlns:p14="http://schemas.microsoft.com/office/powerpoint/2010/main" val="1024086991"/>
+      </p:ext>
+    </p:extLst>
+  </p:cSld>
+  <p:clrMapOvr>
+    <a:masterClrMapping/>
+  </p:clrMapOvr>
+</p:notes>
+</file>
+
 <file path=ppt/notesSlides/notesSlide6.xml><?xml version="1.0" encoding="utf-8"?>
 <p:notes xmlns:a="http://schemas.openxmlformats.org/drawingml/2006/main" xmlns:r="http://schemas.openxmlformats.org/officeDocument/2006/relationships" xmlns:p="http://schemas.openxmlformats.org/presentationml/2006/main">
   <p:cSld>
@@ -4685,7 +4952,7 @@
           <a:p>
             <a:r>
               <a:rPr lang="en-US" dirty="0"/>
-              <a:t>Listen carefully to this situation from real life. Cameroon sells raw cotton and cocoa beans at low prices. Later, it buys back clothes and chocolate made from them at high prices. Djibrilla wonders why. Think about it, because I am going to ask you some questions.</a:t>
+              <a:t>Listen carefully to this situation from real life. Cameroon sells raw cotton and cocoa beans at low prices, and later buys back clothes and chocolate made from them at high prices. Djibrilla asks: "What do we call the work of changing raw materials into new goods, and why is it important?" Think about it, because I am going to ask you some questions.</a:t>
             </a:r>
             <a:endParaRPr lang="en-US" dirty="0"/>
           </a:p>
@@ -6368,7 +6635,7 @@
                 <a:ea typeface="Times New Roman" pitchFamily="34" charset="-122"/>
                 <a:cs typeface="Times New Roman" pitchFamily="34" charset="-120"/>
               </a:rPr>
-              <a:t>Cameroon sells raw products cheaply and buys finished goods at high prices.</a:t>
+              <a:t>Djibrilla does not know the sector that transforms raw materials.</a:t>
             </a:r>
             <a:endParaRPr lang="en-US" sz="4000" dirty="0"/>
           </a:p>
@@ -6587,7 +6854,7 @@
                 <a:ea typeface="Times New Roman" pitchFamily="34" charset="-122"/>
                 <a:cs typeface="Times New Roman" pitchFamily="34" charset="-120"/>
               </a:rPr>
-              <a:t>What are clothes and chocolate made from?</a:t>
+              <a:t>What does Cameroon sell?</a:t>
             </a:r>
             <a:endParaRPr lang="en-US" sz="4000" dirty="0"/>
           </a:p>
@@ -6806,7 +7073,7 @@
                 <a:ea typeface="Times New Roman" pitchFamily="34" charset="-122"/>
                 <a:cs typeface="Times New Roman" pitchFamily="34" charset="-120"/>
               </a:rPr>
-              <a:t>Cotton and cocoa.</a:t>
+              <a:t>Raw cotton and cocoa beans.</a:t>
             </a:r>
             <a:endParaRPr lang="en-US" sz="4000" dirty="0"/>
           </a:p>
@@ -7025,7 +7292,7 @@
                 <a:ea typeface="Times New Roman" pitchFamily="34" charset="-122"/>
                 <a:cs typeface="Times New Roman" pitchFamily="34" charset="-120"/>
               </a:rPr>
-              <a:t>What can Cameroon do?</a:t>
+              <a:t>What does it buy back?</a:t>
             </a:r>
             <a:endParaRPr lang="en-US" sz="4000" dirty="0"/>
           </a:p>
@@ -7244,7 +7511,7 @@
                 <a:ea typeface="Times New Roman" pitchFamily="34" charset="-122"/>
                 <a:cs typeface="Times New Roman" pitchFamily="34" charset="-120"/>
               </a:rPr>
-              <a:t>Build more factories to make the goods here.</a:t>
+              <a:t>Clothes and chocolate.</a:t>
             </a:r>
             <a:endParaRPr lang="en-US" sz="4000" dirty="0"/>
           </a:p>
@@ -7794,7 +8061,7 @@
                 <a:ea typeface="Calibri" pitchFamily="34" charset="-122"/>
                 <a:cs typeface="Calibri" pitchFamily="34" charset="-120"/>
               </a:rPr>
-              <a:t>1. MEANING</a:t>
+              <a:t>DEFINITION</a:t>
             </a:r>
             <a:endParaRPr lang="en-US" sz="1400" dirty="0"/>
           </a:p>
@@ -7896,7 +8163,7 @@
                 <a:ea typeface="Times New Roman" pitchFamily="34" charset="-122"/>
                 <a:cs typeface="Times New Roman" pitchFamily="34" charset="-120"/>
               </a:rPr>
-              <a:t>Machines that weave cloth in a factory.</a:t>
+              <a:t>A textile factory.</a:t>
             </a:r>
             <a:endParaRPr lang="en-US" sz="1800" dirty="0"/>
           </a:p>
@@ -8008,7 +8275,7 @@
                 <a:ea typeface="Calibri" pitchFamily="34" charset="-122"/>
                 <a:cs typeface="Calibri" pitchFamily="34" charset="-120"/>
               </a:rPr>
-              <a:t>1. MEANING</a:t>
+              <a:t>DEFINITION</a:t>
             </a:r>
             <a:endParaRPr lang="en-US" sz="1400" dirty="0"/>
           </a:p>
@@ -8822,7 +9089,7 @@
                 <a:ea typeface="Calibri" pitchFamily="34" charset="-122"/>
                 <a:cs typeface="Calibri" pitchFamily="34" charset="-120"/>
               </a:rPr>
-              <a:t>1. MEANING</a:t>
+              <a:t>DEFINITION</a:t>
             </a:r>
             <a:endParaRPr lang="en-US" sz="1400" dirty="0"/>
           </a:p>
@@ -9041,7 +9308,7 @@
                 <a:ea typeface="Calibri" pitchFamily="34" charset="-122"/>
                 <a:cs typeface="Calibri" pitchFamily="34" charset="-120"/>
               </a:rPr>
-              <a:t>2. EXAMPLES</a:t>
+              <a:t>EXAMPLES</a:t>
             </a:r>
             <a:endParaRPr lang="en-US" sz="1400" dirty="0"/>
           </a:p>
@@ -9143,7 +9410,7 @@
                 <a:ea typeface="Times New Roman" pitchFamily="34" charset="-122"/>
                 <a:cs typeface="Times New Roman" pitchFamily="34" charset="-120"/>
               </a:rPr>
-              <a:t>Machines fill bottles in a drinks factory.</a:t>
+              <a:t>A drinks factory.</a:t>
             </a:r>
             <a:endParaRPr lang="en-US" sz="1800" dirty="0"/>
           </a:p>
@@ -9255,7 +9522,7 @@
                 <a:ea typeface="Calibri" pitchFamily="34" charset="-122"/>
                 <a:cs typeface="Calibri" pitchFamily="34" charset="-120"/>
               </a:rPr>
-              <a:t>2. EXAMPLES</a:t>
+              <a:t>EXAMPLES</a:t>
             </a:r>
             <a:endParaRPr lang="en-US" sz="1400" dirty="0"/>
           </a:p>
@@ -9362,7 +9629,7 @@
                 <a:ea typeface="Times New Roman" pitchFamily="34" charset="-122"/>
                 <a:cs typeface="Times New Roman" pitchFamily="34" charset="-120"/>
               </a:rPr>
-              <a:t>Name two factories of North Cameroon and what they make.</a:t>
+              <a:t>Name one factory of North Cameroon.</a:t>
             </a:r>
             <a:endParaRPr lang="en-US" sz="4000" dirty="0"/>
           </a:p>
@@ -9474,7 +9741,7 @@
                 <a:ea typeface="Calibri" pitchFamily="34" charset="-122"/>
                 <a:cs typeface="Calibri" pitchFamily="34" charset="-120"/>
               </a:rPr>
-              <a:t>2. EXAMPLES</a:t>
+              <a:t>EXAMPLES</a:t>
             </a:r>
             <a:endParaRPr lang="en-US" sz="1400" dirty="0"/>
           </a:p>
@@ -9581,7 +9848,7 @@
                 <a:ea typeface="Times New Roman" pitchFamily="34" charset="-122"/>
                 <a:cs typeface="Times New Roman" pitchFamily="34" charset="-120"/>
               </a:rPr>
-              <a:t>CICAM (cloth) and SODECOTON (cotton oil). Also drinks factories.</a:t>
+              <a:t>CICAM (cloth) or SODECOTON (cotton oil).</a:t>
             </a:r>
             <a:endParaRPr lang="en-US" sz="4000" dirty="0"/>
           </a:p>
@@ -9693,7 +9960,7 @@
                 <a:ea typeface="Calibri" pitchFamily="34" charset="-122"/>
                 <a:cs typeface="Calibri" pitchFamily="34" charset="-120"/>
               </a:rPr>
-              <a:t>2. EXAMPLES</a:t>
+              <a:t>EXAMPLES</a:t>
             </a:r>
             <a:endParaRPr lang="en-US" sz="1400" dirty="0"/>
           </a:p>
@@ -9795,7 +10062,7 @@
                 <a:ea typeface="Times New Roman" pitchFamily="34" charset="-122"/>
                 <a:cs typeface="Times New Roman" pitchFamily="34" charset="-120"/>
               </a:rPr>
-              <a:t>An aluminium factory seen from the sky.</a:t>
+              <a:t>An aluminium factory.</a:t>
             </a:r>
             <a:endParaRPr lang="en-US" sz="1800" dirty="0"/>
           </a:p>
@@ -9907,7 +10174,7 @@
                 <a:ea typeface="Calibri" pitchFamily="34" charset="-122"/>
                 <a:cs typeface="Calibri" pitchFamily="34" charset="-120"/>
               </a:rPr>
-              <a:t>2. EXAMPLES</a:t>
+              <a:t>EXAMPLES</a:t>
             </a:r>
             <a:endParaRPr lang="en-US" sz="1400" dirty="0"/>
           </a:p>
@@ -10014,7 +10281,7 @@
                 <a:ea typeface="Times New Roman" pitchFamily="34" charset="-122"/>
                 <a:cs typeface="Times New Roman" pitchFamily="34" charset="-120"/>
               </a:rPr>
-              <a:t>Alucam at Edéa makes aluminium. What type of industry is this?</a:t>
+              <a:t>What does Alucam in Edéa make?</a:t>
             </a:r>
             <a:endParaRPr lang="en-US" sz="4000" dirty="0"/>
           </a:p>
@@ -10126,7 +10393,7 @@
                 <a:ea typeface="Calibri" pitchFamily="34" charset="-122"/>
                 <a:cs typeface="Calibri" pitchFamily="34" charset="-120"/>
               </a:rPr>
-              <a:t>2. EXAMPLES</a:t>
+              <a:t>EXAMPLES</a:t>
             </a:r>
             <a:endParaRPr lang="en-US" sz="1400" dirty="0"/>
           </a:p>
@@ -10233,7 +10500,7 @@
                 <a:ea typeface="Times New Roman" pitchFamily="34" charset="-122"/>
                 <a:cs typeface="Times New Roman" pitchFamily="34" charset="-120"/>
               </a:rPr>
-              <a:t>A heavy industry: it transforms minerals.</a:t>
+              <a:t>Aluminium.</a:t>
             </a:r>
             <a:endParaRPr lang="en-US" sz="4000" dirty="0"/>
           </a:p>
@@ -10345,7 +10612,7 @@
                 <a:ea typeface="Calibri" pitchFamily="34" charset="-122"/>
                 <a:cs typeface="Calibri" pitchFamily="34" charset="-120"/>
               </a:rPr>
-              <a:t>2. EXAMPLES</a:t>
+              <a:t>EXAMPLES</a:t>
             </a:r>
             <a:endParaRPr lang="en-US" sz="1400" dirty="0"/>
           </a:p>
@@ -10447,7 +10714,7 @@
                 <a:ea typeface="Times New Roman" pitchFamily="34" charset="-122"/>
                 <a:cs typeface="Times New Roman" pitchFamily="34" charset="-120"/>
               </a:rPr>
-              <a:t>Workers build a house.</a:t>
+              <a:t>Builders at work.</a:t>
             </a:r>
             <a:endParaRPr lang="en-US" sz="1800" dirty="0"/>
           </a:p>
@@ -10559,7 +10826,7 @@
                 <a:ea typeface="Calibri" pitchFamily="34" charset="-122"/>
                 <a:cs typeface="Calibri" pitchFamily="34" charset="-120"/>
               </a:rPr>
-              <a:t>2. EXAMPLES</a:t>
+              <a:t>EXAMPLES</a:t>
             </a:r>
             <a:endParaRPr lang="en-US" sz="1400" dirty="0"/>
           </a:p>
@@ -10666,7 +10933,7 @@
                 <a:ea typeface="Times New Roman" pitchFamily="34" charset="-122"/>
                 <a:cs typeface="Times New Roman" pitchFamily="34" charset="-120"/>
               </a:rPr>
-              <a:t>Is building houses and roads part of the secondary sector? Why?</a:t>
+              <a:t>Is building houses part of the secondary sector?</a:t>
             </a:r>
             <a:endParaRPr lang="en-US" sz="4000" dirty="0"/>
           </a:p>
@@ -10778,7 +11045,7 @@
                 <a:ea typeface="Calibri" pitchFamily="34" charset="-122"/>
                 <a:cs typeface="Calibri" pitchFamily="34" charset="-120"/>
               </a:rPr>
-              <a:t>2. EXAMPLES</a:t>
+              <a:t>EXAMPLES</a:t>
             </a:r>
             <a:endParaRPr lang="en-US" sz="1400" dirty="0"/>
           </a:p>
@@ -10885,7 +11152,7 @@
                 <a:ea typeface="Times New Roman" pitchFamily="34" charset="-122"/>
                 <a:cs typeface="Times New Roman" pitchFamily="34" charset="-120"/>
               </a:rPr>
-              <a:t>Yes. Builders make new things from sand, cement and iron.</a:t>
+              <a:t>Yes: builders make new things from cement, sand and iron.</a:t>
             </a:r>
             <a:endParaRPr lang="en-US" sz="4000" dirty="0"/>
           </a:p>
@@ -12006,7 +12273,7 @@
                 <a:ea typeface="Calibri" pitchFamily="34" charset="-122"/>
                 <a:cs typeface="Calibri" pitchFamily="34" charset="-120"/>
               </a:rPr>
-              <a:t>2. EXAMPLES</a:t>
+              <a:t>EXAMPLES</a:t>
             </a:r>
             <a:endParaRPr lang="en-US" sz="1400" dirty="0"/>
           </a:p>
@@ -12108,7 +12375,7 @@
                 <a:ea typeface="Times New Roman" pitchFamily="34" charset="-122"/>
                 <a:cs typeface="Times New Roman" pitchFamily="34" charset="-120"/>
               </a:rPr>
-              <a:t>A blacksmith makes tools.</a:t>
+              <a:t>A blacksmith.</a:t>
             </a:r>
             <a:endParaRPr lang="en-US" sz="1800" dirty="0"/>
           </a:p>
@@ -12220,7 +12487,7 @@
                 <a:ea typeface="Calibri" pitchFamily="34" charset="-122"/>
                 <a:cs typeface="Calibri" pitchFamily="34" charset="-120"/>
               </a:rPr>
-              <a:t>2. EXAMPLES</a:t>
+              <a:t>EXAMPLES</a:t>
             </a:r>
             <a:endParaRPr lang="en-US" sz="1400" dirty="0"/>
           </a:p>
@@ -12327,7 +12594,7 @@
                 <a:ea typeface="Times New Roman" pitchFamily="34" charset="-122"/>
                 <a:cs typeface="Times New Roman" pitchFamily="34" charset="-120"/>
               </a:rPr>
-              <a:t>The blacksmith makes tools by hand. What do we call this work?</a:t>
+              <a:t>What do we call making tools by hand?</a:t>
             </a:r>
             <a:endParaRPr lang="en-US" sz="4000" dirty="0"/>
           </a:p>
@@ -12439,7 +12706,7 @@
                 <a:ea typeface="Calibri" pitchFamily="34" charset="-122"/>
                 <a:cs typeface="Calibri" pitchFamily="34" charset="-120"/>
               </a:rPr>
-              <a:t>2. EXAMPLES</a:t>
+              <a:t>EXAMPLES</a:t>
             </a:r>
             <a:endParaRPr lang="en-US" sz="1400" dirty="0"/>
           </a:p>
@@ -12757,7 +13024,7 @@
               <a:buNone/>
             </a:pPr>
             <a:r>
-              <a:rPr lang="en-US" sz="4000" b="1" dirty="0">
+              <a:rPr lang="en-US" sz="3200" b="1" dirty="0">
                 <a:solidFill>
                   <a:srgbClr val="111111"/>
                 </a:solidFill>
@@ -12767,7 +13034,7 @@
               </a:rPr>
               <a:t>Topic: Economic Activities</a:t>
             </a:r>
-            <a:endParaRPr lang="en-US" sz="4000" dirty="0"/>
+            <a:endParaRPr lang="en-US" sz="3200" dirty="0"/>
           </a:p>
           <a:p>
             <a:pPr algn="l" indent="0" marL="0">
@@ -12777,7 +13044,7 @@
               <a:buNone/>
             </a:pPr>
             <a:r>
-              <a:rPr lang="en-US" sz="4000" b="1" dirty="0">
+              <a:rPr lang="en-US" sz="3200" b="1" dirty="0">
                 <a:solidFill>
                   <a:srgbClr val="111111"/>
                 </a:solidFill>
@@ -12787,7 +13054,7 @@
               </a:rPr>
               <a:t>Sub-topic: Sectors of the Economy</a:t>
             </a:r>
-            <a:endParaRPr lang="en-US" sz="4000" dirty="0"/>
+            <a:endParaRPr lang="en-US" sz="3200" dirty="0"/>
           </a:p>
           <a:p>
             <a:pPr algn="l" indent="0" marL="0">
@@ -12797,7 +13064,7 @@
               <a:buNone/>
             </a:pPr>
             <a:r>
-              <a:rPr lang="en-US" sz="4000" b="1" dirty="0">
+              <a:rPr lang="en-US" sz="3200" b="1" dirty="0">
                 <a:solidFill>
                   <a:srgbClr val="990011"/>
                 </a:solidFill>
@@ -12807,7 +13074,7 @@
               </a:rPr>
               <a:t>Lesson 5 (Part 4): The Sectors of the Economy: The Secondary Sector (Definition and Examples)</a:t>
             </a:r>
-            <a:endParaRPr lang="en-US" sz="4000" dirty="0"/>
+            <a:endParaRPr lang="en-US" sz="3200" dirty="0"/>
           </a:p>
         </p:txBody>
       </p:sp>
@@ -12940,7 +13207,7 @@
         <p:spPr>
           <a:xfrm>
             <a:off x="0" y="658368"/>
-            <a:ext cx="2468880" cy="5833872"/>
+            <a:ext cx="3840480" cy="5833872"/>
           </a:xfrm>
           <a:prstGeom prst="rect">
             <a:avLst/>
@@ -12955,8 +13222,8 @@
         </p:nvSpPr>
         <p:spPr>
           <a:xfrm>
-            <a:off x="2697480" y="1005840"/>
-            <a:ext cx="9174175" cy="731520"/>
+            <a:off x="4069080" y="1005840"/>
+            <a:ext cx="7802575" cy="731520"/>
           </a:xfrm>
           <a:prstGeom prst="rect">
             <a:avLst/>
@@ -12982,7 +13249,7 @@
                 <a:ea typeface="Times New Roman" pitchFamily="34" charset="-122"/>
                 <a:cs typeface="Times New Roman" pitchFamily="34" charset="-120"/>
               </a:rPr>
-              <a:t>1. Meaning of the Secondary Sector</a:t>
+              <a:t>DEFINITIONS</a:t>
             </a:r>
             <a:endParaRPr lang="en-US" sz="3600" dirty="0"/>
           </a:p>
@@ -12996,8 +13263,8 @@
         </p:nvSpPr>
         <p:spPr>
           <a:xfrm>
-            <a:off x="2697480" y="1783080"/>
-            <a:ext cx="9174175" cy="4663440"/>
+            <a:off x="4069080" y="1783080"/>
+            <a:ext cx="7802575" cy="4663440"/>
           </a:xfrm>
           <a:prstGeom prst="rect">
             <a:avLst/>
@@ -13024,16 +13291,17 @@
                 <a:ea typeface="Times New Roman" pitchFamily="34" charset="-122"/>
                 <a:cs typeface="Times New Roman" pitchFamily="34" charset="-120"/>
               </a:rPr>
-              <a:t>The secondary sector is defined as follows:</a:t>
+              <a:t>The key terms of this lesson are defined as follows:</a:t>
             </a:r>
             <a:endParaRPr lang="en-US" sz="4000" dirty="0"/>
           </a:p>
           <a:p>
-            <a:pPr algn="l" indent="0" marL="0">
+            <a:pPr algn="l" marL="342900" indent="-342900">
               <a:spcAft>
                 <a:spcPts val="800"/>
               </a:spcAft>
-              <a:buNone/>
+              <a:buSzPct val="100000"/>
+              <a:buChar char="•"/>
             </a:pPr>
             <a:r>
               <a:rPr lang="en-US" sz="4000" b="1" dirty="0">
@@ -13046,11 +13314,12 @@
               </a:rPr>
               <a:t>Secondary sector: </a:t>
             </a:r>
-            <a:pPr algn="l" indent="0" marL="0">
+            <a:pPr algn="l" marL="342900" indent="-342900">
               <a:spcAft>
                 <a:spcPts val="800"/>
               </a:spcAft>
-              <a:buNone/>
+              <a:buSzPct val="100000"/>
+              <a:buChar char="•"/>
             </a:pPr>
             <a:r>
               <a:rPr lang="en-US" sz="4000" dirty="0">
@@ -13061,16 +13330,17 @@
                 <a:ea typeface="Times New Roman" pitchFamily="34" charset="-122"/>
                 <a:cs typeface="Times New Roman" pitchFamily="34" charset="-120"/>
               </a:rPr>
-              <a:t>It is the sector that turns raw materials into finished goods.</a:t>
+              <a:t>It is made of activities that transform raw materials into new goods.</a:t>
             </a:r>
             <a:endParaRPr lang="en-US" sz="4000" dirty="0"/>
           </a:p>
           <a:p>
-            <a:pPr algn="l" indent="0" marL="0">
+            <a:pPr algn="l" marL="342900" indent="-342900">
               <a:spcAft>
                 <a:spcPts val="800"/>
               </a:spcAft>
-              <a:buNone/>
+              <a:buSzPct val="100000"/>
+              <a:buChar char="•"/>
             </a:pPr>
             <a:r>
               <a:rPr lang="en-US" sz="4000" b="1" dirty="0">
@@ -13081,13 +13351,14 @@
                 <a:ea typeface="Times New Roman" pitchFamily="34" charset="-122"/>
                 <a:cs typeface="Times New Roman" pitchFamily="34" charset="-120"/>
               </a:rPr>
-              <a:t>Industry and craft: </a:t>
-            </a:r>
-            <a:pPr algn="l" indent="0" marL="0">
+              <a:t>Industry: </a:t>
+            </a:r>
+            <a:pPr algn="l" marL="342900" indent="-342900">
               <a:spcAft>
                 <a:spcPts val="800"/>
               </a:spcAft>
-              <a:buNone/>
+              <a:buSzPct val="100000"/>
+              <a:buChar char="•"/>
             </a:pPr>
             <a:r>
               <a:rPr lang="en-US" sz="4000" dirty="0">
@@ -13098,7 +13369,7 @@
                 <a:ea typeface="Times New Roman" pitchFamily="34" charset="-122"/>
                 <a:cs typeface="Times New Roman" pitchFamily="34" charset="-120"/>
               </a:rPr>
-              <a:t>An industry makes goods in factories, while a craft makes goods by hand.</a:t>
+              <a:t>It is a place or activity where goods are made.</a:t>
             </a:r>
             <a:endParaRPr lang="en-US" sz="4000" dirty="0"/>
           </a:p>
@@ -13216,9 +13487,131 @@
           </a:p>
         </p:txBody>
       </p:sp>
+      <p:sp>
+        <p:nvSpPr>
+          <p:cNvPr id="3" name="Text 1"/>
+          <p:cNvSpPr/>
+          <p:nvPr/>
+        </p:nvSpPr>
+        <p:spPr>
+          <a:xfrm>
+            <a:off x="365760" y="1005840"/>
+            <a:ext cx="11460175" cy="731520"/>
+          </a:xfrm>
+          <a:prstGeom prst="rect">
+            <a:avLst/>
+          </a:prstGeom>
+          <a:noFill/>
+          <a:ln/>
+        </p:spPr>
+        <p:txBody>
+          <a:bodyPr wrap="square" lIns="0" tIns="0" rIns="0" bIns="0" rtlCol="0" anchor="ctr">
+            <a:normAutofit/>
+          </a:bodyPr>
+          <a:lstStyle/>
+          <a:p>
+            <a:pPr algn="ctr" indent="0" marL="0">
+              <a:buNone/>
+            </a:pPr>
+            <a:r>
+              <a:rPr lang="en-US" sz="3600" b="1" dirty="0">
+                <a:solidFill>
+                  <a:srgbClr val="990011"/>
+                </a:solidFill>
+                <a:latin typeface="Times New Roman" pitchFamily="34" charset="0"/>
+                <a:ea typeface="Times New Roman" pitchFamily="34" charset="-122"/>
+                <a:cs typeface="Times New Roman" pitchFamily="34" charset="-120"/>
+              </a:rPr>
+              <a:t>Examples of Secondary Activities</a:t>
+            </a:r>
+            <a:endParaRPr lang="en-US" sz="3600" dirty="0"/>
+          </a:p>
+        </p:txBody>
+      </p:sp>
+      <p:sp>
+        <p:nvSpPr>
+          <p:cNvPr id="4" name="Text 2"/>
+          <p:cNvSpPr/>
+          <p:nvPr/>
+        </p:nvSpPr>
+        <p:spPr>
+          <a:xfrm>
+            <a:off x="365760" y="1783080"/>
+            <a:ext cx="4846320" cy="4617720"/>
+          </a:xfrm>
+          <a:prstGeom prst="rect">
+            <a:avLst/>
+          </a:prstGeom>
+          <a:noFill/>
+          <a:ln/>
+        </p:spPr>
+        <p:txBody>
+          <a:bodyPr wrap="square" lIns="0" tIns="0" rIns="0" bIns="0" rtlCol="0" anchor="t"/>
+          <a:lstStyle/>
+          <a:p>
+            <a:pPr algn="l" indent="0" marL="0">
+              <a:spcAft>
+                <a:spcPts val="800"/>
+              </a:spcAft>
+              <a:buNone/>
+            </a:pPr>
+            <a:r>
+              <a:rPr lang="en-US" sz="3600" i="1" dirty="0">
+                <a:solidFill>
+                  <a:srgbClr val="111111"/>
+                </a:solidFill>
+                <a:latin typeface="Times New Roman" pitchFamily="34" charset="0"/>
+                <a:ea typeface="Times New Roman" pitchFamily="34" charset="-122"/>
+                <a:cs typeface="Times New Roman" pitchFamily="34" charset="-120"/>
+              </a:rPr>
+              <a:t>The secondary sector includes the following activities:</a:t>
+            </a:r>
+            <a:endParaRPr lang="en-US" sz="3600" dirty="0"/>
+          </a:p>
+          <a:p>
+            <a:pPr algn="l" marL="342900" indent="-342900">
+              <a:spcAft>
+                <a:spcPts val="800"/>
+              </a:spcAft>
+              <a:buSzPct val="100000"/>
+              <a:buChar char="•"/>
+            </a:pPr>
+            <a:r>
+              <a:rPr lang="en-US" sz="3600" b="1" dirty="0">
+                <a:solidFill>
+                  <a:srgbClr val="111111"/>
+                </a:solidFill>
+                <a:latin typeface="Times New Roman" pitchFamily="34" charset="0"/>
+                <a:ea typeface="Times New Roman" pitchFamily="34" charset="-122"/>
+                <a:cs typeface="Times New Roman" pitchFamily="34" charset="-120"/>
+              </a:rPr>
+              <a:t>Light industries: </a:t>
+            </a:r>
+            <a:pPr algn="l" marL="342900" indent="-342900">
+              <a:spcAft>
+                <a:spcPts val="800"/>
+              </a:spcAft>
+              <a:buSzPct val="100000"/>
+              <a:buChar char="•"/>
+            </a:pPr>
+            <a:r>
+              <a:rPr lang="en-US" sz="3600" dirty="0">
+                <a:solidFill>
+                  <a:srgbClr val="111111"/>
+                </a:solidFill>
+                <a:latin typeface="Times New Roman" pitchFamily="34" charset="0"/>
+                <a:ea typeface="Times New Roman" pitchFamily="34" charset="-122"/>
+                <a:cs typeface="Times New Roman" pitchFamily="34" charset="-120"/>
+              </a:rPr>
+              <a:t>Cloth (CICAM), drinks (SABC) and cotton oil (SODECOTON).</a:t>
+            </a:r>
+            <a:endParaRPr lang="en-US" sz="3600" dirty="0"/>
+          </a:p>
+        </p:txBody>
+      </p:sp>
       <p:pic>
         <p:nvPicPr>
-          <p:cNvPr id="3" name="Image 0" descr="/home/claude/f4/img/minesec_sheet.png">    </p:cNvPr>
+          <p:cNvPr id="5" name="Image 0" descr="/home/claude/f4/img/v2/f2t_textile_factory.jpg">    </p:cNvPr>
           <p:cNvPicPr>
             <a:picLocks noChangeAspect="1"/>
           </p:cNvPicPr>
@@ -13232,8 +13625,8 @@
         </p:blipFill>
         <p:spPr>
           <a:xfrm>
-            <a:off x="0" y="658368"/>
-            <a:ext cx="3840480" cy="5833872"/>
+            <a:off x="5349240" y="2071212"/>
+            <a:ext cx="6659575" cy="3693983"/>
           </a:xfrm>
           <a:prstGeom prst="rect">
             <a:avLst/>
@@ -13242,14 +13635,14 @@
       </p:pic>
       <p:sp>
         <p:nvSpPr>
-          <p:cNvPr id="4" name="Text 1"/>
+          <p:cNvPr id="6" name="Text 3"/>
           <p:cNvSpPr/>
           <p:nvPr/>
         </p:nvSpPr>
         <p:spPr>
           <a:xfrm>
-            <a:off x="4069080" y="1005840"/>
-            <a:ext cx="7802575" cy="731520"/>
+            <a:off x="5349240" y="6089904"/>
+            <a:ext cx="6659575" cy="347472"/>
           </a:xfrm>
           <a:prstGeom prst="rect">
             <a:avLst/>
@@ -13258,142 +13651,24 @@
           <a:ln/>
         </p:spPr>
         <p:txBody>
-          <a:bodyPr wrap="square" lIns="0" tIns="0" rIns="0" bIns="0" rtlCol="0" anchor="ctr">
-            <a:normAutofit/>
-          </a:bodyPr>
+          <a:bodyPr wrap="square" lIns="0" tIns="0" rIns="0" bIns="0" rtlCol="0" anchor="ctr"/>
           <a:lstStyle/>
           <a:p>
             <a:pPr algn="ctr" indent="0" marL="0">
               <a:buNone/>
             </a:pPr>
             <a:r>
-              <a:rPr lang="en-US" sz="3600" b="1" dirty="0">
-                <a:solidFill>
-                  <a:srgbClr val="990011"/>
+              <a:rPr lang="en-US" sz="1600" i="1" dirty="0">
+                <a:solidFill>
+                  <a:srgbClr val="555555"/>
                 </a:solidFill>
                 <a:latin typeface="Times New Roman" pitchFamily="34" charset="0"/>
                 <a:ea typeface="Times New Roman" pitchFamily="34" charset="-122"/>
                 <a:cs typeface="Times New Roman" pitchFamily="34" charset="-120"/>
               </a:rPr>
-              <a:t>2. Examples of the Secondary Sector</a:t>
-            </a:r>
-            <a:endParaRPr lang="en-US" sz="3600" dirty="0"/>
-          </a:p>
-        </p:txBody>
-      </p:sp>
-      <p:sp>
-        <p:nvSpPr>
-          <p:cNvPr id="5" name="Text 2"/>
-          <p:cNvSpPr/>
-          <p:nvPr/>
-        </p:nvSpPr>
-        <p:spPr>
-          <a:xfrm>
-            <a:off x="4069080" y="1783080"/>
-            <a:ext cx="7802575" cy="4663440"/>
-          </a:xfrm>
-          <a:prstGeom prst="rect">
-            <a:avLst/>
-          </a:prstGeom>
-          <a:noFill/>
-          <a:ln/>
-        </p:spPr>
-        <p:txBody>
-          <a:bodyPr wrap="square" lIns="0" tIns="0" rIns="0" bIns="0" rtlCol="0" anchor="t"/>
-          <a:lstStyle/>
-          <a:p>
-            <a:pPr algn="l" indent="0" marL="0">
-              <a:spcAft>
-                <a:spcPts val="800"/>
-              </a:spcAft>
-              <a:buNone/>
-            </a:pPr>
-            <a:r>
-              <a:rPr lang="en-US" sz="4000" i="1" dirty="0">
-                <a:solidFill>
-                  <a:srgbClr val="111111"/>
-                </a:solidFill>
-                <a:latin typeface="Times New Roman" pitchFamily="34" charset="0"/>
-                <a:ea typeface="Times New Roman" pitchFamily="34" charset="-122"/>
-                <a:cs typeface="Times New Roman" pitchFamily="34" charset="-120"/>
-              </a:rPr>
-              <a:t>The secondary sector in Cameroon includes the following activities:</a:t>
-            </a:r>
-            <a:endParaRPr lang="en-US" sz="4000" dirty="0"/>
-          </a:p>
-          <a:p>
-            <a:pPr algn="l" indent="0" marL="0">
-              <a:spcAft>
-                <a:spcPts val="800"/>
-              </a:spcAft>
-              <a:buNone/>
-            </a:pPr>
-            <a:r>
-              <a:rPr lang="en-US" sz="4000" b="1" dirty="0">
-                <a:solidFill>
-                  <a:srgbClr val="111111"/>
-                </a:solidFill>
-                <a:latin typeface="Times New Roman" pitchFamily="34" charset="0"/>
-                <a:ea typeface="Times New Roman" pitchFamily="34" charset="-122"/>
-                <a:cs typeface="Times New Roman" pitchFamily="34" charset="-120"/>
-              </a:rPr>
-              <a:t>Agro-industries: </a:t>
-            </a:r>
-            <a:pPr algn="l" indent="0" marL="0">
-              <a:spcAft>
-                <a:spcPts val="800"/>
-              </a:spcAft>
-              <a:buNone/>
-            </a:pPr>
-            <a:r>
-              <a:rPr lang="en-US" sz="4000" dirty="0">
-                <a:solidFill>
-                  <a:srgbClr val="111111"/>
-                </a:solidFill>
-                <a:latin typeface="Times New Roman" pitchFamily="34" charset="0"/>
-                <a:ea typeface="Times New Roman" pitchFamily="34" charset="-122"/>
-                <a:cs typeface="Times New Roman" pitchFamily="34" charset="-120"/>
-              </a:rPr>
-              <a:t>CICAM makes cloth from cotton and breweries make drinks.</a:t>
-            </a:r>
-            <a:endParaRPr lang="en-US" sz="4000" dirty="0"/>
-          </a:p>
-          <a:p>
-            <a:pPr algn="l" indent="0" marL="0">
-              <a:spcAft>
-                <a:spcPts val="800"/>
-              </a:spcAft>
-              <a:buNone/>
-            </a:pPr>
-            <a:r>
-              <a:rPr lang="en-US" sz="4000" b="1" dirty="0">
-                <a:solidFill>
-                  <a:srgbClr val="111111"/>
-                </a:solidFill>
-                <a:latin typeface="Times New Roman" pitchFamily="34" charset="0"/>
-                <a:ea typeface="Times New Roman" pitchFamily="34" charset="-122"/>
-                <a:cs typeface="Times New Roman" pitchFamily="34" charset="-120"/>
-              </a:rPr>
-              <a:t>Heavy industries: </a:t>
-            </a:r>
-            <a:pPr algn="l" indent="0" marL="0">
-              <a:spcAft>
-                <a:spcPts val="800"/>
-              </a:spcAft>
-              <a:buNone/>
-            </a:pPr>
-            <a:r>
-              <a:rPr lang="en-US" sz="4000" dirty="0">
-                <a:solidFill>
-                  <a:srgbClr val="111111"/>
-                </a:solidFill>
-                <a:latin typeface="Times New Roman" pitchFamily="34" charset="0"/>
-                <a:ea typeface="Times New Roman" pitchFamily="34" charset="-122"/>
-                <a:cs typeface="Times New Roman" pitchFamily="34" charset="-120"/>
-              </a:rPr>
-              <a:t>Alucam in Edéa makes aluminium.</a:t>
-            </a:r>
-            <a:endParaRPr lang="en-US" sz="4000" dirty="0"/>
+              <a:t>Illustration: a textile factory</a:t>
+            </a:r>
+            <a:endParaRPr lang="en-US" sz="1600" dirty="0"/>
           </a:p>
         </p:txBody>
       </p:sp>
@@ -13509,9 +13784,111 @@
           </a:p>
         </p:txBody>
       </p:sp>
+      <p:sp>
+        <p:nvSpPr>
+          <p:cNvPr id="3" name="Text 1"/>
+          <p:cNvSpPr/>
+          <p:nvPr/>
+        </p:nvSpPr>
+        <p:spPr>
+          <a:xfrm>
+            <a:off x="365760" y="1005840"/>
+            <a:ext cx="11460175" cy="731520"/>
+          </a:xfrm>
+          <a:prstGeom prst="rect">
+            <a:avLst/>
+          </a:prstGeom>
+          <a:noFill/>
+          <a:ln/>
+        </p:spPr>
+        <p:txBody>
+          <a:bodyPr wrap="square" lIns="0" tIns="0" rIns="0" bIns="0" rtlCol="0" anchor="ctr">
+            <a:normAutofit/>
+          </a:bodyPr>
+          <a:lstStyle/>
+          <a:p>
+            <a:pPr algn="ctr" indent="0" marL="0">
+              <a:buNone/>
+            </a:pPr>
+            <a:r>
+              <a:rPr lang="en-US" sz="3600" b="1" dirty="0">
+                <a:solidFill>
+                  <a:srgbClr val="990011"/>
+                </a:solidFill>
+                <a:latin typeface="Times New Roman" pitchFamily="34" charset="0"/>
+                <a:ea typeface="Times New Roman" pitchFamily="34" charset="-122"/>
+                <a:cs typeface="Times New Roman" pitchFamily="34" charset="-120"/>
+              </a:rPr>
+              <a:t>Examples of Secondary Activities</a:t>
+            </a:r>
+            <a:endParaRPr lang="en-US" sz="3600" dirty="0"/>
+          </a:p>
+        </p:txBody>
+      </p:sp>
+      <p:sp>
+        <p:nvSpPr>
+          <p:cNvPr id="4" name="Text 2"/>
+          <p:cNvSpPr/>
+          <p:nvPr/>
+        </p:nvSpPr>
+        <p:spPr>
+          <a:xfrm>
+            <a:off x="365760" y="1783080"/>
+            <a:ext cx="4846320" cy="4617720"/>
+          </a:xfrm>
+          <a:prstGeom prst="rect">
+            <a:avLst/>
+          </a:prstGeom>
+          <a:noFill/>
+          <a:ln/>
+        </p:spPr>
+        <p:txBody>
+          <a:bodyPr wrap="square" lIns="0" tIns="0" rIns="0" bIns="0" rtlCol="0" anchor="t"/>
+          <a:lstStyle/>
+          <a:p>
+            <a:pPr algn="l" marL="342900" indent="-342900">
+              <a:spcAft>
+                <a:spcPts val="800"/>
+              </a:spcAft>
+              <a:buSzPct val="100000"/>
+              <a:buChar char="•"/>
+            </a:pPr>
+            <a:r>
+              <a:rPr lang="en-US" sz="3600" b="1" dirty="0">
+                <a:solidFill>
+                  <a:srgbClr val="111111"/>
+                </a:solidFill>
+                <a:latin typeface="Times New Roman" pitchFamily="34" charset="0"/>
+                <a:ea typeface="Times New Roman" pitchFamily="34" charset="-122"/>
+                <a:cs typeface="Times New Roman" pitchFamily="34" charset="-120"/>
+              </a:rPr>
+              <a:t>Heavy industries: </a:t>
+            </a:r>
+            <a:pPr algn="l" marL="342900" indent="-342900">
+              <a:spcAft>
+                <a:spcPts val="800"/>
+              </a:spcAft>
+              <a:buSzPct val="100000"/>
+              <a:buChar char="•"/>
+            </a:pPr>
+            <a:r>
+              <a:rPr lang="en-US" sz="3600" dirty="0">
+                <a:solidFill>
+                  <a:srgbClr val="111111"/>
+                </a:solidFill>
+                <a:latin typeface="Times New Roman" pitchFamily="34" charset="0"/>
+                <a:ea typeface="Times New Roman" pitchFamily="34" charset="-122"/>
+                <a:cs typeface="Times New Roman" pitchFamily="34" charset="-120"/>
+              </a:rPr>
+              <a:t>Aluminium (Alucam at Edéa) and cement (CIMENCAM at Figuil).</a:t>
+            </a:r>
+            <a:endParaRPr lang="en-US" sz="3600" dirty="0"/>
+          </a:p>
+        </p:txBody>
+      </p:sp>
       <p:pic>
         <p:nvPicPr>
-          <p:cNvPr id="3" name="Image 0" descr="/home/claude/f4/img/minesec_sheet.png">    </p:cNvPr>
+          <p:cNvPr id="5" name="Image 0" descr="/home/claude/f4/img/v2/f2t_aluminium.jpg">    </p:cNvPr>
           <p:cNvPicPr>
             <a:picLocks noChangeAspect="1"/>
           </p:cNvPicPr>
@@ -13525,8 +13902,8 @@
         </p:blipFill>
         <p:spPr>
           <a:xfrm>
-            <a:off x="0" y="658368"/>
-            <a:ext cx="5120640" cy="5833872"/>
+            <a:off x="5349240" y="2071212"/>
+            <a:ext cx="6659575" cy="3693983"/>
           </a:xfrm>
           <a:prstGeom prst="rect">
             <a:avLst/>
@@ -13535,14 +13912,14 @@
       </p:pic>
       <p:sp>
         <p:nvSpPr>
-          <p:cNvPr id="4" name="Text 1"/>
+          <p:cNvPr id="6" name="Text 3"/>
           <p:cNvSpPr/>
           <p:nvPr/>
         </p:nvSpPr>
         <p:spPr>
           <a:xfrm>
-            <a:off x="5349240" y="1005840"/>
-            <a:ext cx="6522415" cy="731520"/>
+            <a:off x="5349240" y="6089904"/>
+            <a:ext cx="6659575" cy="347472"/>
           </a:xfrm>
           <a:prstGeom prst="rect">
             <a:avLst/>
@@ -13551,159 +13928,24 @@
           <a:ln/>
         </p:spPr>
         <p:txBody>
-          <a:bodyPr wrap="square" lIns="0" tIns="0" rIns="0" bIns="0" rtlCol="0" anchor="ctr">
-            <a:normAutofit/>
-          </a:bodyPr>
+          <a:bodyPr wrap="square" lIns="0" tIns="0" rIns="0" bIns="0" rtlCol="0" anchor="ctr"/>
           <a:lstStyle/>
           <a:p>
             <a:pPr algn="ctr" indent="0" marL="0">
               <a:buNone/>
             </a:pPr>
             <a:r>
-              <a:rPr lang="en-US" sz="3600" b="1" dirty="0">
-                <a:solidFill>
-                  <a:srgbClr val="990011"/>
+              <a:rPr lang="en-US" sz="1600" i="1" dirty="0">
+                <a:solidFill>
+                  <a:srgbClr val="555555"/>
                 </a:solidFill>
                 <a:latin typeface="Times New Roman" pitchFamily="34" charset="0"/>
                 <a:ea typeface="Times New Roman" pitchFamily="34" charset="-122"/>
                 <a:cs typeface="Times New Roman" pitchFamily="34" charset="-120"/>
               </a:rPr>
-              <a:t>2. Examples of the Secondary Sector (continued)</a:t>
-            </a:r>
-            <a:endParaRPr lang="en-US" sz="3600" dirty="0"/>
-          </a:p>
-        </p:txBody>
-      </p:sp>
-      <p:sp>
-        <p:nvSpPr>
-          <p:cNvPr id="5" name="Text 2"/>
-          <p:cNvSpPr/>
-          <p:nvPr/>
-        </p:nvSpPr>
-        <p:spPr>
-          <a:xfrm>
-            <a:off x="5349240" y="1783080"/>
-            <a:ext cx="6522415" cy="4663440"/>
-          </a:xfrm>
-          <a:prstGeom prst="rect">
-            <a:avLst/>
-          </a:prstGeom>
-          <a:noFill/>
-          <a:ln/>
-        </p:spPr>
-        <p:txBody>
-          <a:bodyPr wrap="square" lIns="0" tIns="0" rIns="0" bIns="0" rtlCol="0" anchor="t"/>
-          <a:lstStyle/>
-          <a:p>
-            <a:pPr algn="l" indent="0" marL="0">
-              <a:spcAft>
-                <a:spcPts val="800"/>
-              </a:spcAft>
-              <a:buNone/>
-            </a:pPr>
-            <a:r>
-              <a:rPr lang="en-US" sz="4000" b="1" dirty="0">
-                <a:solidFill>
-                  <a:srgbClr val="111111"/>
-                </a:solidFill>
-                <a:latin typeface="Times New Roman" pitchFamily="34" charset="0"/>
-                <a:ea typeface="Times New Roman" pitchFamily="34" charset="-122"/>
-                <a:cs typeface="Times New Roman" pitchFamily="34" charset="-120"/>
-              </a:rPr>
-              <a:t>Construction: </a:t>
-            </a:r>
-            <a:pPr algn="l" indent="0" marL="0">
-              <a:spcAft>
-                <a:spcPts val="800"/>
-              </a:spcAft>
-              <a:buNone/>
-            </a:pPr>
-            <a:r>
-              <a:rPr lang="en-US" sz="4000" dirty="0">
-                <a:solidFill>
-                  <a:srgbClr val="111111"/>
-                </a:solidFill>
-                <a:latin typeface="Times New Roman" pitchFamily="34" charset="0"/>
-                <a:ea typeface="Times New Roman" pitchFamily="34" charset="-122"/>
-                <a:cs typeface="Times New Roman" pitchFamily="34" charset="-120"/>
-              </a:rPr>
-              <a:t>Workers build houses, roads and bridges.</a:t>
-            </a:r>
-            <a:endParaRPr lang="en-US" sz="4000" dirty="0"/>
-          </a:p>
-          <a:p>
-            <a:pPr algn="l" indent="0" marL="0">
-              <a:spcAft>
-                <a:spcPts val="800"/>
-              </a:spcAft>
-              <a:buNone/>
-            </a:pPr>
-            <a:r>
-              <a:rPr lang="en-US" sz="4000" b="1" dirty="0">
-                <a:solidFill>
-                  <a:srgbClr val="111111"/>
-                </a:solidFill>
-                <a:latin typeface="Times New Roman" pitchFamily="34" charset="0"/>
-                <a:ea typeface="Times New Roman" pitchFamily="34" charset="-122"/>
-                <a:cs typeface="Times New Roman" pitchFamily="34" charset="-120"/>
-              </a:rPr>
-              <a:t>Energy: </a:t>
-            </a:r>
-            <a:pPr algn="l" indent="0" marL="0">
-              <a:spcAft>
-                <a:spcPts val="800"/>
-              </a:spcAft>
-              <a:buNone/>
-            </a:pPr>
-            <a:r>
-              <a:rPr lang="en-US" sz="4000" dirty="0">
-                <a:solidFill>
-                  <a:srgbClr val="111111"/>
-                </a:solidFill>
-                <a:latin typeface="Times New Roman" pitchFamily="34" charset="0"/>
-                <a:ea typeface="Times New Roman" pitchFamily="34" charset="-122"/>
-                <a:cs typeface="Times New Roman" pitchFamily="34" charset="-120"/>
-              </a:rPr>
-              <a:t>The Lagdo and Edéa dams produce electricity.</a:t>
-            </a:r>
-            <a:endParaRPr lang="en-US" sz="4000" dirty="0"/>
-          </a:p>
-          <a:p>
-            <a:pPr algn="l" indent="0" marL="0">
-              <a:spcAft>
-                <a:spcPts val="800"/>
-              </a:spcAft>
-              <a:buNone/>
-            </a:pPr>
-            <a:r>
-              <a:rPr lang="en-US" sz="4000" b="1" dirty="0">
-                <a:solidFill>
-                  <a:srgbClr val="111111"/>
-                </a:solidFill>
-                <a:latin typeface="Times New Roman" pitchFamily="34" charset="0"/>
-                <a:ea typeface="Times New Roman" pitchFamily="34" charset="-122"/>
-                <a:cs typeface="Times New Roman" pitchFamily="34" charset="-120"/>
-              </a:rPr>
-              <a:t>Crafts: </a:t>
-            </a:r>
-            <a:pPr algn="l" indent="0" marL="0">
-              <a:spcAft>
-                <a:spcPts val="800"/>
-              </a:spcAft>
-              <a:buNone/>
-            </a:pPr>
-            <a:r>
-              <a:rPr lang="en-US" sz="4000" dirty="0">
-                <a:solidFill>
-                  <a:srgbClr val="111111"/>
-                </a:solidFill>
-                <a:latin typeface="Times New Roman" pitchFamily="34" charset="0"/>
-                <a:ea typeface="Times New Roman" pitchFamily="34" charset="-122"/>
-                <a:cs typeface="Times New Roman" pitchFamily="34" charset="-120"/>
-              </a:rPr>
-              <a:t>Tailors, blacksmiths and potters make goods by hand.</a:t>
-            </a:r>
-            <a:endParaRPr lang="en-US" sz="4000" dirty="0"/>
+              <a:t>Illustration: an aluminium factory</a:t>
+            </a:r>
+            <a:endParaRPr lang="en-US" sz="1600" dirty="0"/>
           </a:p>
         </p:txBody>
       </p:sp>
@@ -13813,7 +14055,7 @@
                 <a:ea typeface="Calibri" pitchFamily="34" charset="-122"/>
                 <a:cs typeface="Calibri" pitchFamily="34" charset="-120"/>
               </a:rPr>
-              <a:t>FORMATIVE EVALUATION</a:t>
+              <a:t>BOARD SUMMARY</a:t>
             </a:r>
             <a:endParaRPr lang="en-US" sz="1400" dirty="0"/>
           </a:p>
@@ -13878,7 +14120,7 @@
                 <a:ea typeface="Times New Roman" pitchFamily="34" charset="-122"/>
                 <a:cs typeface="Times New Roman" pitchFamily="34" charset="-120"/>
               </a:rPr>
-              <a:t>Evaluation 1</a:t>
+              <a:t>Examples of Secondary Activities</a:t>
             </a:r>
             <a:endParaRPr lang="en-US" sz="3600" dirty="0"/>
           </a:p>
@@ -13905,14 +14147,15 @@
           <a:bodyPr wrap="square" lIns="0" tIns="0" rIns="0" bIns="0" rtlCol="0" anchor="t"/>
           <a:lstStyle/>
           <a:p>
-            <a:pPr algn="l" indent="0" marL="0">
+            <a:pPr algn="l" marL="342900" indent="-342900">
               <a:spcAft>
                 <a:spcPts val="800"/>
               </a:spcAft>
-              <a:buNone/>
+              <a:buSzPct val="100000"/>
+              <a:buChar char="•"/>
             </a:pPr>
             <a:r>
-              <a:rPr lang="en-US" sz="4000" dirty="0">
+              <a:rPr lang="en-US" sz="4000" b="1" dirty="0">
                 <a:solidFill>
                   <a:srgbClr val="111111"/>
                 </a:solidFill>
@@ -13920,7 +14163,25 @@
                 <a:ea typeface="Times New Roman" pitchFamily="34" charset="-122"/>
                 <a:cs typeface="Times New Roman" pitchFamily="34" charset="-120"/>
               </a:rPr>
-              <a:t>What is the secondary sector?</a:t>
+              <a:t>Building and public works: </a:t>
+            </a:r>
+            <a:pPr algn="l" marL="342900" indent="-342900">
+              <a:spcAft>
+                <a:spcPts val="800"/>
+              </a:spcAft>
+              <a:buSzPct val="100000"/>
+              <a:buChar char="•"/>
+            </a:pPr>
+            <a:r>
+              <a:rPr lang="en-US" sz="4000" dirty="0">
+                <a:solidFill>
+                  <a:srgbClr val="111111"/>
+                </a:solidFill>
+                <a:latin typeface="Times New Roman" pitchFamily="34" charset="0"/>
+                <a:ea typeface="Times New Roman" pitchFamily="34" charset="-122"/>
+                <a:cs typeface="Times New Roman" pitchFamily="34" charset="-120"/>
+              </a:rPr>
+              <a:t>Houses, roads and bridges.</a:t>
             </a:r>
             <a:endParaRPr lang="en-US" sz="4000" dirty="0"/>
           </a:p>
@@ -14032,15 +14293,117 @@
                 <a:ea typeface="Calibri" pitchFamily="34" charset="-122"/>
                 <a:cs typeface="Calibri" pitchFamily="34" charset="-120"/>
               </a:rPr>
-              <a:t>FORMATIVE EVALUATION</a:t>
+              <a:t>BOARD SUMMARY</a:t>
             </a:r>
             <a:endParaRPr lang="en-US" sz="1400" dirty="0"/>
+          </a:p>
+        </p:txBody>
+      </p:sp>
+      <p:sp>
+        <p:nvSpPr>
+          <p:cNvPr id="3" name="Text 1"/>
+          <p:cNvSpPr/>
+          <p:nvPr/>
+        </p:nvSpPr>
+        <p:spPr>
+          <a:xfrm>
+            <a:off x="365760" y="1005840"/>
+            <a:ext cx="11460175" cy="731520"/>
+          </a:xfrm>
+          <a:prstGeom prst="rect">
+            <a:avLst/>
+          </a:prstGeom>
+          <a:noFill/>
+          <a:ln/>
+        </p:spPr>
+        <p:txBody>
+          <a:bodyPr wrap="square" lIns="0" tIns="0" rIns="0" bIns="0" rtlCol="0" anchor="ctr">
+            <a:normAutofit/>
+          </a:bodyPr>
+          <a:lstStyle/>
+          <a:p>
+            <a:pPr algn="ctr" indent="0" marL="0">
+              <a:buNone/>
+            </a:pPr>
+            <a:r>
+              <a:rPr lang="en-US" sz="3600" b="1" dirty="0">
+                <a:solidFill>
+                  <a:srgbClr val="990011"/>
+                </a:solidFill>
+                <a:latin typeface="Times New Roman" pitchFamily="34" charset="0"/>
+                <a:ea typeface="Times New Roman" pitchFamily="34" charset="-122"/>
+                <a:cs typeface="Times New Roman" pitchFamily="34" charset="-120"/>
+              </a:rPr>
+              <a:t>Examples of Secondary Activities</a:t>
+            </a:r>
+            <a:endParaRPr lang="en-US" sz="3600" dirty="0"/>
+          </a:p>
+        </p:txBody>
+      </p:sp>
+      <p:sp>
+        <p:nvSpPr>
+          <p:cNvPr id="4" name="Text 2"/>
+          <p:cNvSpPr/>
+          <p:nvPr/>
+        </p:nvSpPr>
+        <p:spPr>
+          <a:xfrm>
+            <a:off x="365760" y="1783080"/>
+            <a:ext cx="4846320" cy="4617720"/>
+          </a:xfrm>
+          <a:prstGeom prst="rect">
+            <a:avLst/>
+          </a:prstGeom>
+          <a:noFill/>
+          <a:ln/>
+        </p:spPr>
+        <p:txBody>
+          <a:bodyPr wrap="square" lIns="0" tIns="0" rIns="0" bIns="0" rtlCol="0" anchor="t"/>
+          <a:lstStyle/>
+          <a:p>
+            <a:pPr algn="l" marL="342900" indent="-342900">
+              <a:spcAft>
+                <a:spcPts val="800"/>
+              </a:spcAft>
+              <a:buSzPct val="100000"/>
+              <a:buChar char="•"/>
+            </a:pPr>
+            <a:r>
+              <a:rPr lang="en-US" sz="3600" b="1" dirty="0">
+                <a:solidFill>
+                  <a:srgbClr val="111111"/>
+                </a:solidFill>
+                <a:latin typeface="Times New Roman" pitchFamily="34" charset="0"/>
+                <a:ea typeface="Times New Roman" pitchFamily="34" charset="-122"/>
+                <a:cs typeface="Times New Roman" pitchFamily="34" charset="-120"/>
+              </a:rPr>
+              <a:t>Crafts: </a:t>
+            </a:r>
+            <a:pPr algn="l" marL="342900" indent="-342900">
+              <a:spcAft>
+                <a:spcPts val="800"/>
+              </a:spcAft>
+              <a:buSzPct val="100000"/>
+              <a:buChar char="•"/>
+            </a:pPr>
+            <a:r>
+              <a:rPr lang="en-US" sz="3600" dirty="0">
+                <a:solidFill>
+                  <a:srgbClr val="111111"/>
+                </a:solidFill>
+                <a:latin typeface="Times New Roman" pitchFamily="34" charset="0"/>
+                <a:ea typeface="Times New Roman" pitchFamily="34" charset="-122"/>
+                <a:cs typeface="Times New Roman" pitchFamily="34" charset="-120"/>
+              </a:rPr>
+              <a:t>Blacksmiths, potters, weavers and carpenters.</a:t>
+            </a:r>
+            <a:endParaRPr lang="en-US" sz="3600" dirty="0"/>
           </a:p>
         </p:txBody>
       </p:sp>
       <p:pic>
         <p:nvPicPr>
-          <p:cNvPr id="3" name="Image 0" descr="/home/claude/f4/img/minesec_sheet.png">    </p:cNvPr>
+          <p:cNvPr id="5" name="Image 0" descr="/home/claude/f4/img/v2/f2t_blacksmith.jpg">    </p:cNvPr>
           <p:cNvPicPr>
             <a:picLocks noChangeAspect="1"/>
           </p:cNvPicPr>
@@ -14054,8 +14417,8 @@
         </p:blipFill>
         <p:spPr>
           <a:xfrm>
-            <a:off x="0" y="658368"/>
-            <a:ext cx="5120640" cy="5833872"/>
+            <a:off x="5349240" y="2071212"/>
+            <a:ext cx="6659575" cy="3693983"/>
           </a:xfrm>
           <a:prstGeom prst="rect">
             <a:avLst/>
@@ -14064,14 +14427,14 @@
       </p:pic>
       <p:sp>
         <p:nvSpPr>
-          <p:cNvPr id="4" name="Text 1"/>
+          <p:cNvPr id="6" name="Text 3"/>
           <p:cNvSpPr/>
           <p:nvPr/>
         </p:nvSpPr>
         <p:spPr>
           <a:xfrm>
-            <a:off x="5349240" y="1005840"/>
-            <a:ext cx="6522415" cy="731520"/>
+            <a:off x="5349240" y="6089904"/>
+            <a:ext cx="6659575" cy="347472"/>
           </a:xfrm>
           <a:prstGeom prst="rect">
             <a:avLst/>
@@ -14080,68 +14443,24 @@
           <a:ln/>
         </p:spPr>
         <p:txBody>
-          <a:bodyPr wrap="square" lIns="0" tIns="0" rIns="0" bIns="0" rtlCol="0" anchor="ctr">
-            <a:normAutofit/>
-          </a:bodyPr>
+          <a:bodyPr wrap="square" lIns="0" tIns="0" rIns="0" bIns="0" rtlCol="0" anchor="ctr"/>
           <a:lstStyle/>
           <a:p>
             <a:pPr algn="ctr" indent="0" marL="0">
               <a:buNone/>
             </a:pPr>
             <a:r>
-              <a:rPr lang="en-US" sz="3600" b="1" dirty="0">
-                <a:solidFill>
-                  <a:srgbClr val="990011"/>
+              <a:rPr lang="en-US" sz="1600" i="1" dirty="0">
+                <a:solidFill>
+                  <a:srgbClr val="555555"/>
                 </a:solidFill>
                 <a:latin typeface="Times New Roman" pitchFamily="34" charset="0"/>
                 <a:ea typeface="Times New Roman" pitchFamily="34" charset="-122"/>
                 <a:cs typeface="Times New Roman" pitchFamily="34" charset="-120"/>
               </a:rPr>
-              <a:t>Expected Answer</a:t>
-            </a:r>
-            <a:endParaRPr lang="en-US" sz="3600" dirty="0"/>
-          </a:p>
-        </p:txBody>
-      </p:sp>
-      <p:sp>
-        <p:nvSpPr>
-          <p:cNvPr id="5" name="Text 2"/>
-          <p:cNvSpPr/>
-          <p:nvPr/>
-        </p:nvSpPr>
-        <p:spPr>
-          <a:xfrm>
-            <a:off x="5349240" y="1783080"/>
-            <a:ext cx="6522415" cy="4663440"/>
-          </a:xfrm>
-          <a:prstGeom prst="rect">
-            <a:avLst/>
-          </a:prstGeom>
-          <a:noFill/>
-          <a:ln/>
-        </p:spPr>
-        <p:txBody>
-          <a:bodyPr wrap="square" lIns="0" tIns="0" rIns="0" bIns="0" rtlCol="0" anchor="t"/>
-          <a:lstStyle/>
-          <a:p>
-            <a:pPr algn="l" indent="0" marL="0">
-              <a:spcAft>
-                <a:spcPts val="800"/>
-              </a:spcAft>
-              <a:buNone/>
-            </a:pPr>
-            <a:r>
-              <a:rPr lang="en-US" sz="4000" dirty="0">
-                <a:solidFill>
-                  <a:srgbClr val="111111"/>
-                </a:solidFill>
-                <a:latin typeface="Times New Roman" pitchFamily="34" charset="0"/>
-                <a:ea typeface="Times New Roman" pitchFamily="34" charset="-122"/>
-                <a:cs typeface="Times New Roman" pitchFamily="34" charset="-120"/>
-              </a:rPr>
-              <a:t>The sector that turns raw materials into goods.</a:t>
-            </a:r>
-            <a:endParaRPr lang="en-US" sz="4000" dirty="0"/>
+              <a:t>Illustration: a blacksmith</a:t>
+            </a:r>
+            <a:endParaRPr lang="en-US" sz="1600" dirty="0"/>
           </a:p>
         </p:txBody>
       </p:sp>
@@ -14251,7 +14570,7 @@
                 <a:ea typeface="Calibri" pitchFamily="34" charset="-122"/>
                 <a:cs typeface="Calibri" pitchFamily="34" charset="-120"/>
               </a:rPr>
-              <a:t>FORMATIVE EVALUATION</a:t>
+              <a:t>BOARD SUMMARY</a:t>
             </a:r>
             <a:endParaRPr lang="en-US" sz="1400" dirty="0"/>
           </a:p>
@@ -14316,7 +14635,7 @@
                 <a:ea typeface="Times New Roman" pitchFamily="34" charset="-122"/>
                 <a:cs typeface="Times New Roman" pitchFamily="34" charset="-120"/>
               </a:rPr>
-              <a:t>Evaluation 2</a:t>
+              <a:t>Examples of Secondary Activities</a:t>
             </a:r>
             <a:endParaRPr lang="en-US" sz="3600" dirty="0"/>
           </a:p>
@@ -14343,14 +14662,15 @@
           <a:bodyPr wrap="square" lIns="0" tIns="0" rIns="0" bIns="0" rtlCol="0" anchor="t"/>
           <a:lstStyle/>
           <a:p>
-            <a:pPr algn="l" indent="0" marL="0">
+            <a:pPr algn="l" marL="342900" indent="-342900">
               <a:spcAft>
                 <a:spcPts val="800"/>
               </a:spcAft>
-              <a:buNone/>
+              <a:buSzPct val="100000"/>
+              <a:buChar char="•"/>
             </a:pPr>
             <a:r>
-              <a:rPr lang="en-US" sz="4000" dirty="0">
+              <a:rPr lang="en-US" sz="4000" b="1" dirty="0">
                 <a:solidFill>
                   <a:srgbClr val="111111"/>
                 </a:solidFill>
@@ -14358,7 +14678,25 @@
                 <a:ea typeface="Times New Roman" pitchFamily="34" charset="-122"/>
                 <a:cs typeface="Times New Roman" pitchFamily="34" charset="-120"/>
               </a:rPr>
-              <a:t>Give two examples of industries in Cameroon.</a:t>
+              <a:t>Energy production: </a:t>
+            </a:r>
+            <a:pPr algn="l" marL="342900" indent="-342900">
+              <a:spcAft>
+                <a:spcPts val="800"/>
+              </a:spcAft>
+              <a:buSzPct val="100000"/>
+              <a:buChar char="•"/>
+            </a:pPr>
+            <a:r>
+              <a:rPr lang="en-US" sz="4000" dirty="0">
+                <a:solidFill>
+                  <a:srgbClr val="111111"/>
+                </a:solidFill>
+                <a:latin typeface="Times New Roman" pitchFamily="34" charset="0"/>
+                <a:ea typeface="Times New Roman" pitchFamily="34" charset="-122"/>
+                <a:cs typeface="Times New Roman" pitchFamily="34" charset="-120"/>
+              </a:rPr>
+              <a:t>Electricity from dams such as Lagdo.</a:t>
             </a:r>
             <a:endParaRPr lang="en-US" sz="4000" dirty="0"/>
           </a:p>
@@ -14774,7 +15112,7 @@
                 <a:ea typeface="Times New Roman" pitchFamily="34" charset="-122"/>
                 <a:cs typeface="Times New Roman" pitchFamily="34" charset="-120"/>
               </a:rPr>
-              <a:t>Expected Answer</a:t>
+              <a:t>Evaluation 1</a:t>
             </a:r>
             <a:endParaRPr lang="en-US" sz="3600" dirty="0"/>
           </a:p>
@@ -14816,7 +15154,7 @@
                 <a:ea typeface="Times New Roman" pitchFamily="34" charset="-122"/>
                 <a:cs typeface="Times New Roman" pitchFamily="34" charset="-120"/>
               </a:rPr>
-              <a:t>CICAM (cloth) and Alucam (aluminium).</a:t>
+              <a:t>What is the secondary sector?</a:t>
             </a:r>
             <a:endParaRPr lang="en-US" sz="4000" dirty="0"/>
           </a:p>
@@ -14928,7 +15266,7 @@
                 <a:ea typeface="Calibri" pitchFamily="34" charset="-122"/>
                 <a:cs typeface="Calibri" pitchFamily="34" charset="-120"/>
               </a:rPr>
-              <a:t>REMEDIATION</a:t>
+              <a:t>FORMATIVE EVALUATION</a:t>
             </a:r>
             <a:endParaRPr lang="en-US" sz="1400" dirty="0"/>
           </a:p>
@@ -14951,7 +15289,7 @@
         <p:spPr>
           <a:xfrm>
             <a:off x="0" y="658368"/>
-            <a:ext cx="3840480" cy="5833872"/>
+            <a:ext cx="5120640" cy="5833872"/>
           </a:xfrm>
           <a:prstGeom prst="rect">
             <a:avLst/>
@@ -14966,8 +15304,8 @@
         </p:nvSpPr>
         <p:spPr>
           <a:xfrm>
-            <a:off x="4069080" y="1005840"/>
-            <a:ext cx="7802575" cy="731520"/>
+            <a:off x="5349240" y="1005840"/>
+            <a:ext cx="6522415" cy="731520"/>
           </a:xfrm>
           <a:prstGeom prst="rect">
             <a:avLst/>
@@ -14993,7 +15331,7 @@
                 <a:ea typeface="Times New Roman" pitchFamily="34" charset="-122"/>
                 <a:cs typeface="Times New Roman" pitchFamily="34" charset="-120"/>
               </a:rPr>
-              <a:t>Remediation</a:t>
+              <a:t>Expected Answer</a:t>
             </a:r>
             <a:endParaRPr lang="en-US" sz="3600" dirty="0"/>
           </a:p>
@@ -15007,8 +15345,8 @@
         </p:nvSpPr>
         <p:spPr>
           <a:xfrm>
-            <a:off x="4069080" y="1783080"/>
-            <a:ext cx="7802575" cy="4663440"/>
+            <a:off x="5349240" y="1783080"/>
+            <a:ext cx="6522415" cy="4663440"/>
           </a:xfrm>
           <a:prstGeom prst="rect">
             <a:avLst/>
@@ -15027,7 +15365,7 @@
               <a:buNone/>
             </a:pPr>
             <a:r>
-              <a:rPr lang="en-US" sz="4000" b="1" dirty="0">
+              <a:rPr lang="en-US" sz="4000" dirty="0">
                 <a:solidFill>
                   <a:srgbClr val="111111"/>
                 </a:solidFill>
@@ -15035,73 +15373,7 @@
                 <a:ea typeface="Times New Roman" pitchFamily="34" charset="-122"/>
                 <a:cs typeface="Times New Roman" pitchFamily="34" charset="-120"/>
               </a:rPr>
-              <a:t>Fill in the blanks:</a:t>
-            </a:r>
-            <a:endParaRPr lang="en-US" sz="4000" dirty="0"/>
-          </a:p>
-          <a:p>
-            <a:pPr algn="l" marL="342900" indent="-342900">
-              <a:spcAft>
-                <a:spcPts val="800"/>
-              </a:spcAft>
-              <a:buSzPct val="100000"/>
-              <a:buFont typeface="+mj-lt"/>
-              <a:buAutoNum type="arabicPeriod" startAt="1"/>
-            </a:pPr>
-            <a:r>
-              <a:rPr lang="en-US" sz="4000" dirty="0">
-                <a:solidFill>
-                  <a:srgbClr val="111111"/>
-                </a:solidFill>
-                <a:latin typeface="Times New Roman" pitchFamily="34" charset="0"/>
-                <a:ea typeface="Times New Roman" pitchFamily="34" charset="-122"/>
-                <a:cs typeface="Times New Roman" pitchFamily="34" charset="-120"/>
-              </a:rPr>
-              <a:t>Turning raw materials into goods is the ______ sector.</a:t>
-            </a:r>
-            <a:endParaRPr lang="en-US" sz="4000" dirty="0"/>
-          </a:p>
-          <a:p>
-            <a:pPr algn="l" marL="342900" indent="-342900">
-              <a:spcAft>
-                <a:spcPts val="800"/>
-              </a:spcAft>
-              <a:buSzPct val="100000"/>
-              <a:buFont typeface="+mj-lt"/>
-              <a:buAutoNum type="arabicPeriod" startAt="1"/>
-            </a:pPr>
-            <a:r>
-              <a:rPr lang="en-US" sz="4000" dirty="0">
-                <a:solidFill>
-                  <a:srgbClr val="111111"/>
-                </a:solidFill>
-                <a:latin typeface="Times New Roman" pitchFamily="34" charset="0"/>
-                <a:ea typeface="Times New Roman" pitchFamily="34" charset="-122"/>
-                <a:cs typeface="Times New Roman" pitchFamily="34" charset="-120"/>
-              </a:rPr>
-              <a:t>CICAM turns cotton into ______.</a:t>
-            </a:r>
-            <a:endParaRPr lang="en-US" sz="4000" dirty="0"/>
-          </a:p>
-          <a:p>
-            <a:pPr algn="l" marL="342900" indent="-342900">
-              <a:spcAft>
-                <a:spcPts val="800"/>
-              </a:spcAft>
-              <a:buSzPct val="100000"/>
-              <a:buFont typeface="+mj-lt"/>
-              <a:buAutoNum type="arabicPeriod" startAt="1"/>
-            </a:pPr>
-            <a:r>
-              <a:rPr lang="en-US" sz="4000" dirty="0">
-                <a:solidFill>
-                  <a:srgbClr val="111111"/>
-                </a:solidFill>
-                <a:latin typeface="Times New Roman" pitchFamily="34" charset="0"/>
-                <a:ea typeface="Times New Roman" pitchFamily="34" charset="-122"/>
-                <a:cs typeface="Times New Roman" pitchFamily="34" charset="-120"/>
-              </a:rPr>
-              <a:t>Alucam at Edéa makes ______.</a:t>
+              <a:t>The sector that turns raw materials into goods.</a:t>
             </a:r>
             <a:endParaRPr lang="en-US" sz="4000" dirty="0"/>
           </a:p>
@@ -15213,7 +15485,7 @@
                 <a:ea typeface="Calibri" pitchFamily="34" charset="-122"/>
                 <a:cs typeface="Calibri" pitchFamily="34" charset="-120"/>
               </a:rPr>
-              <a:t>HOMEWORK</a:t>
+              <a:t>FORMATIVE EVALUATION</a:t>
             </a:r>
             <a:endParaRPr lang="en-US" sz="1400" dirty="0"/>
           </a:p>
@@ -15278,7 +15550,7 @@
                 <a:ea typeface="Times New Roman" pitchFamily="34" charset="-122"/>
                 <a:cs typeface="Times New Roman" pitchFamily="34" charset="-120"/>
               </a:rPr>
-              <a:t>Homework</a:t>
+              <a:t>Evaluation 2</a:t>
             </a:r>
             <a:endParaRPr lang="en-US" sz="3600" dirty="0"/>
           </a:p>
@@ -15320,7 +15592,7 @@
                 <a:ea typeface="Times New Roman" pitchFamily="34" charset="-122"/>
                 <a:cs typeface="Times New Roman" pitchFamily="34" charset="-120"/>
               </a:rPr>
-              <a:t>List four services that your family uses every week, for example transport, school, hospital, market or mobile money.</a:t>
+              <a:t>Give two examples of industries in Cameroon.</a:t>
             </a:r>
             <a:endParaRPr lang="en-US" sz="4000" dirty="0"/>
           </a:p>
@@ -15432,7 +15704,7 @@
                 <a:ea typeface="Calibri" pitchFamily="34" charset="-122"/>
                 <a:cs typeface="Calibri" pitchFamily="34" charset="-120"/>
               </a:rPr>
-              <a:t>NEXT LESSON</a:t>
+              <a:t>FORMATIVE EVALUATION</a:t>
             </a:r>
             <a:endParaRPr lang="en-US" sz="1400" dirty="0"/>
           </a:p>
@@ -15497,7 +15769,7 @@
                 <a:ea typeface="Times New Roman" pitchFamily="34" charset="-122"/>
                 <a:cs typeface="Times New Roman" pitchFamily="34" charset="-120"/>
               </a:rPr>
-              <a:t>Next Lesson</a:t>
+              <a:t>Expected Answer</a:t>
             </a:r>
             <a:endParaRPr lang="en-US" sz="3600" dirty="0"/>
           </a:p>
@@ -15521,17 +15793,17 @@
           <a:ln/>
         </p:spPr>
         <p:txBody>
-          <a:bodyPr wrap="square" lIns="0" tIns="0" rIns="0" bIns="0" rtlCol="0" anchor="ctr"/>
-          <a:lstStyle/>
-          <a:p>
-            <a:pPr algn="ctr" indent="0" marL="0">
+          <a:bodyPr wrap="square" lIns="0" tIns="0" rIns="0" bIns="0" rtlCol="0" anchor="t"/>
+          <a:lstStyle/>
+          <a:p>
+            <a:pPr algn="l" indent="0" marL="0">
               <a:spcAft>
                 <a:spcPts val="800"/>
               </a:spcAft>
               <a:buNone/>
             </a:pPr>
             <a:r>
-              <a:rPr lang="en-US" sz="4000" b="1" dirty="0">
+              <a:rPr lang="en-US" sz="4000" dirty="0">
                 <a:solidFill>
                   <a:srgbClr val="111111"/>
                 </a:solidFill>
@@ -15539,27 +15811,7 @@
                 <a:ea typeface="Times New Roman" pitchFamily="34" charset="-122"/>
                 <a:cs typeface="Times New Roman" pitchFamily="34" charset="-120"/>
               </a:rPr>
-              <a:t>Our next lesson will be on:</a:t>
-            </a:r>
-            <a:endParaRPr lang="en-US" sz="4000" dirty="0"/>
-          </a:p>
-          <a:p>
-            <a:pPr algn="ctr" indent="0" marL="0">
-              <a:spcAft>
-                <a:spcPts val="800"/>
-              </a:spcAft>
-              <a:buNone/>
-            </a:pPr>
-            <a:r>
-              <a:rPr lang="en-US" sz="4000" b="1" dirty="0">
-                <a:solidFill>
-                  <a:srgbClr val="990011"/>
-                </a:solidFill>
-                <a:latin typeface="Times New Roman" pitchFamily="34" charset="0"/>
-                <a:ea typeface="Times New Roman" pitchFamily="34" charset="-122"/>
-                <a:cs typeface="Times New Roman" pitchFamily="34" charset="-120"/>
-              </a:rPr>
-              <a:t>Lesson 5 (Part 5): The Sectors of the Economy: The Tertiary Sector (Definition and Examples)</a:t>
+              <a:t>CICAM (cloth) and Alucam (aluminium).</a:t>
             </a:r>
             <a:endParaRPr lang="en-US" sz="4000" dirty="0"/>
           </a:p>
@@ -15671,6 +15923,749 @@
                 <a:ea typeface="Calibri" pitchFamily="34" charset="-122"/>
                 <a:cs typeface="Calibri" pitchFamily="34" charset="-120"/>
               </a:rPr>
+              <a:t>REMEDIATION</a:t>
+            </a:r>
+            <a:endParaRPr lang="en-US" sz="1400" dirty="0"/>
+          </a:p>
+        </p:txBody>
+      </p:sp>
+      <p:pic>
+        <p:nvPicPr>
+          <p:cNvPr id="3" name="Image 0" descr="/home/claude/f4/img/minesec_sheet.png">    </p:cNvPr>
+          <p:cNvPicPr>
+            <a:picLocks noChangeAspect="1"/>
+          </p:cNvPicPr>
+          <p:nvPr/>
+        </p:nvPicPr>
+        <p:blipFill>
+          <a:blip r:embed="rId1"/>
+          <a:stretch>
+            <a:fillRect/>
+          </a:stretch>
+        </p:blipFill>
+        <p:spPr>
+          <a:xfrm>
+            <a:off x="0" y="658368"/>
+            <a:ext cx="3840480" cy="5833872"/>
+          </a:xfrm>
+          <a:prstGeom prst="rect">
+            <a:avLst/>
+          </a:prstGeom>
+        </p:spPr>
+      </p:pic>
+      <p:sp>
+        <p:nvSpPr>
+          <p:cNvPr id="4" name="Text 1"/>
+          <p:cNvSpPr/>
+          <p:nvPr/>
+        </p:nvSpPr>
+        <p:spPr>
+          <a:xfrm>
+            <a:off x="4069080" y="1005840"/>
+            <a:ext cx="7802575" cy="731520"/>
+          </a:xfrm>
+          <a:prstGeom prst="rect">
+            <a:avLst/>
+          </a:prstGeom>
+          <a:noFill/>
+          <a:ln/>
+        </p:spPr>
+        <p:txBody>
+          <a:bodyPr wrap="square" lIns="0" tIns="0" rIns="0" bIns="0" rtlCol="0" anchor="ctr">
+            <a:normAutofit/>
+          </a:bodyPr>
+          <a:lstStyle/>
+          <a:p>
+            <a:pPr algn="ctr" indent="0" marL="0">
+              <a:buNone/>
+            </a:pPr>
+            <a:r>
+              <a:rPr lang="en-US" sz="3600" b="1" dirty="0">
+                <a:solidFill>
+                  <a:srgbClr val="990011"/>
+                </a:solidFill>
+                <a:latin typeface="Times New Roman" pitchFamily="34" charset="0"/>
+                <a:ea typeface="Times New Roman" pitchFamily="34" charset="-122"/>
+                <a:cs typeface="Times New Roman" pitchFamily="34" charset="-120"/>
+              </a:rPr>
+              <a:t>Remediation</a:t>
+            </a:r>
+            <a:endParaRPr lang="en-US" sz="3600" dirty="0"/>
+          </a:p>
+        </p:txBody>
+      </p:sp>
+      <p:sp>
+        <p:nvSpPr>
+          <p:cNvPr id="5" name="Text 2"/>
+          <p:cNvSpPr/>
+          <p:nvPr/>
+        </p:nvSpPr>
+        <p:spPr>
+          <a:xfrm>
+            <a:off x="4069080" y="1783080"/>
+            <a:ext cx="7802575" cy="4663440"/>
+          </a:xfrm>
+          <a:prstGeom prst="rect">
+            <a:avLst/>
+          </a:prstGeom>
+          <a:noFill/>
+          <a:ln/>
+        </p:spPr>
+        <p:txBody>
+          <a:bodyPr wrap="square" lIns="0" tIns="0" rIns="0" bIns="0" rtlCol="0" anchor="t"/>
+          <a:lstStyle/>
+          <a:p>
+            <a:pPr algn="l" indent="0" marL="0">
+              <a:spcAft>
+                <a:spcPts val="800"/>
+              </a:spcAft>
+              <a:buNone/>
+            </a:pPr>
+            <a:r>
+              <a:rPr lang="en-US" sz="4000" b="1" dirty="0">
+                <a:solidFill>
+                  <a:srgbClr val="111111"/>
+                </a:solidFill>
+                <a:latin typeface="Times New Roman" pitchFamily="34" charset="0"/>
+                <a:ea typeface="Times New Roman" pitchFamily="34" charset="-122"/>
+                <a:cs typeface="Times New Roman" pitchFamily="34" charset="-120"/>
+              </a:rPr>
+              <a:t>Fill in the blanks:</a:t>
+            </a:r>
+            <a:endParaRPr lang="en-US" sz="4000" dirty="0"/>
+          </a:p>
+          <a:p>
+            <a:pPr algn="l" marL="342900" indent="-342900">
+              <a:spcAft>
+                <a:spcPts val="800"/>
+              </a:spcAft>
+              <a:buSzPct val="100000"/>
+              <a:buFont typeface="+mj-lt"/>
+              <a:buAutoNum type="arabicPeriod" startAt="1"/>
+            </a:pPr>
+            <a:r>
+              <a:rPr lang="en-US" sz="4000" dirty="0">
+                <a:solidFill>
+                  <a:srgbClr val="111111"/>
+                </a:solidFill>
+                <a:latin typeface="Times New Roman" pitchFamily="34" charset="0"/>
+                <a:ea typeface="Times New Roman" pitchFamily="34" charset="-122"/>
+                <a:cs typeface="Times New Roman" pitchFamily="34" charset="-120"/>
+              </a:rPr>
+              <a:t>Turning raw materials into goods is the ______ sector.</a:t>
+            </a:r>
+            <a:endParaRPr lang="en-US" sz="4000" dirty="0"/>
+          </a:p>
+          <a:p>
+            <a:pPr algn="l" marL="342900" indent="-342900">
+              <a:spcAft>
+                <a:spcPts val="800"/>
+              </a:spcAft>
+              <a:buSzPct val="100000"/>
+              <a:buFont typeface="+mj-lt"/>
+              <a:buAutoNum type="arabicPeriod" startAt="1"/>
+            </a:pPr>
+            <a:r>
+              <a:rPr lang="en-US" sz="4000" dirty="0">
+                <a:solidFill>
+                  <a:srgbClr val="111111"/>
+                </a:solidFill>
+                <a:latin typeface="Times New Roman" pitchFamily="34" charset="0"/>
+                <a:ea typeface="Times New Roman" pitchFamily="34" charset="-122"/>
+                <a:cs typeface="Times New Roman" pitchFamily="34" charset="-120"/>
+              </a:rPr>
+              <a:t>CICAM turns cotton into ______.</a:t>
+            </a:r>
+            <a:endParaRPr lang="en-US" sz="4000" dirty="0"/>
+          </a:p>
+          <a:p>
+            <a:pPr algn="l" marL="342900" indent="-342900">
+              <a:spcAft>
+                <a:spcPts val="800"/>
+              </a:spcAft>
+              <a:buSzPct val="100000"/>
+              <a:buFont typeface="+mj-lt"/>
+              <a:buAutoNum type="arabicPeriod" startAt="1"/>
+            </a:pPr>
+            <a:r>
+              <a:rPr lang="en-US" sz="4000" dirty="0">
+                <a:solidFill>
+                  <a:srgbClr val="111111"/>
+                </a:solidFill>
+                <a:latin typeface="Times New Roman" pitchFamily="34" charset="0"/>
+                <a:ea typeface="Times New Roman" pitchFamily="34" charset="-122"/>
+                <a:cs typeface="Times New Roman" pitchFamily="34" charset="-120"/>
+              </a:rPr>
+              <a:t>Alucam at Edéa makes ______.</a:t>
+            </a:r>
+            <a:endParaRPr lang="en-US" sz="4000" dirty="0"/>
+          </a:p>
+        </p:txBody>
+      </p:sp>
+      <p:sp>
+        <p:nvSpPr>
+          <p:cNvPr id="25" name="Slide Number Placeholder 0"/>
+          <p:cNvSpPr>
+            <a:spLocks noGrp="1"/>
+          </p:cNvSpPr>
+          <p:nvPr>
+            <p:ph type="sldNum" sz="quarter" idx="4294967295"/>
+          </p:nvPr>
+        </p:nvSpPr>
+        <p:spPr>
+          <a:xfrm>
+            <a:off x="27432" y="91440"/>
+            <a:ext cx="585216" cy="475488"/>
+          </a:xfrm>
+          <a:prstGeom prst="rect">
+            <a:avLst/>
+          </a:prstGeom>
+          <a:extLst>
+            <a:ext uri="{C572A759-6A51-4108-AA02-DFA0A04FC94B}">
+              <ma14:wrappingTextBoxFlag xmlns:ma14="http://schemas.microsoft.com/office/mac/drawingml/2011/main" val="0"/>
+            </a:ext>
+          </a:extLst>
+        </p:spPr>
+        <p:txBody>
+          <a:bodyPr/>
+          <a:lstStyle>
+            <a:lvl1pPr>
+              <a:defRPr sz="2000">
+                <a:solidFill>
+                  <a:srgbClr val="FFFFFF"/>
+                </a:solidFill>
+                <a:latin typeface="Calibri"/>
+                <a:ea typeface="Calibri"/>
+                <a:cs typeface="Calibri"/>
+              </a:defRPr>
+            </a:lvl1pPr>
+          </a:lstStyle>
+          <a:p>
+            <a:pPr algn="ctr"/>
+            <a:fld id="{F7021451-1387-4CA6-816F-3879F97B5CBC}" type="slidenum">
+              <a:rPr b="1" lang="en-US"/>
+              <a:t>44</a:t>
+            </a:fld>
+            <a:endParaRPr lang="en-US"/>
+          </a:p>
+        </p:txBody>
+      </p:sp>
+    </p:spTree>
+  </p:cSld>
+  <p:clrMapOvr>
+    <a:masterClrMapping/>
+  </p:clrMapOvr>
+</p:sld>
+</file>
+
+<file path=ppt/slides/slide45.xml><?xml version="1.0" encoding="utf-8"?>
+<p:sld xmlns:a="http://schemas.openxmlformats.org/drawingml/2006/main" xmlns:r="http://schemas.openxmlformats.org/officeDocument/2006/relationships" xmlns:p="http://schemas.openxmlformats.org/presentationml/2006/main">
+  <p:cSld name="Slide 45">
+    <p:spTree>
+      <p:nvGrpSpPr>
+        <p:cNvPr id="1" name=""/>
+        <p:cNvGrpSpPr/>
+        <p:nvPr/>
+      </p:nvGrpSpPr>
+      <p:grpSpPr>
+        <a:xfrm>
+          <a:off x="0" y="0"/>
+          <a:ext cx="0" cy="0"/>
+          <a:chOff x="0" y="0"/>
+          <a:chExt cx="0" cy="0"/>
+        </a:xfrm>
+      </p:grpSpPr>
+      <p:sp>
+        <p:nvSpPr>
+          <p:cNvPr id="2" name="Text 0"/>
+          <p:cNvSpPr/>
+          <p:nvPr/>
+        </p:nvSpPr>
+        <p:spPr>
+          <a:xfrm>
+            <a:off x="457200" y="713232"/>
+            <a:ext cx="11368735" cy="274320"/>
+          </a:xfrm>
+          <a:prstGeom prst="rect">
+            <a:avLst/>
+          </a:prstGeom>
+          <a:noFill/>
+          <a:ln/>
+        </p:spPr>
+        <p:txBody>
+          <a:bodyPr wrap="square" lIns="0" tIns="0" rIns="0" bIns="0" rtlCol="0" anchor="ctr"/>
+          <a:lstStyle/>
+          <a:p>
+            <a:pPr algn="r" indent="0" marL="0">
+              <a:buNone/>
+            </a:pPr>
+            <a:r>
+              <a:rPr lang="en-US" sz="1400" b="1" dirty="0">
+                <a:solidFill>
+                  <a:srgbClr val="1C3F6E"/>
+                </a:solidFill>
+                <a:latin typeface="Calibri" pitchFamily="34" charset="0"/>
+                <a:ea typeface="Calibri" pitchFamily="34" charset="-122"/>
+                <a:cs typeface="Calibri" pitchFamily="34" charset="-120"/>
+              </a:rPr>
+              <a:t>HOMEWORK</a:t>
+            </a:r>
+            <a:endParaRPr lang="en-US" sz="1400" dirty="0"/>
+          </a:p>
+        </p:txBody>
+      </p:sp>
+      <p:pic>
+        <p:nvPicPr>
+          <p:cNvPr id="3" name="Image 0" descr="/home/claude/f4/img/minesec_sheet.png">    </p:cNvPr>
+          <p:cNvPicPr>
+            <a:picLocks noChangeAspect="1"/>
+          </p:cNvPicPr>
+          <p:nvPr/>
+        </p:nvPicPr>
+        <p:blipFill>
+          <a:blip r:embed="rId1"/>
+          <a:stretch>
+            <a:fillRect/>
+          </a:stretch>
+        </p:blipFill>
+        <p:spPr>
+          <a:xfrm>
+            <a:off x="0" y="658368"/>
+            <a:ext cx="5120640" cy="5833872"/>
+          </a:xfrm>
+          <a:prstGeom prst="rect">
+            <a:avLst/>
+          </a:prstGeom>
+        </p:spPr>
+      </p:pic>
+      <p:sp>
+        <p:nvSpPr>
+          <p:cNvPr id="4" name="Text 1"/>
+          <p:cNvSpPr/>
+          <p:nvPr/>
+        </p:nvSpPr>
+        <p:spPr>
+          <a:xfrm>
+            <a:off x="5349240" y="1005840"/>
+            <a:ext cx="6522415" cy="731520"/>
+          </a:xfrm>
+          <a:prstGeom prst="rect">
+            <a:avLst/>
+          </a:prstGeom>
+          <a:noFill/>
+          <a:ln/>
+        </p:spPr>
+        <p:txBody>
+          <a:bodyPr wrap="square" lIns="0" tIns="0" rIns="0" bIns="0" rtlCol="0" anchor="ctr">
+            <a:normAutofit/>
+          </a:bodyPr>
+          <a:lstStyle/>
+          <a:p>
+            <a:pPr algn="ctr" indent="0" marL="0">
+              <a:buNone/>
+            </a:pPr>
+            <a:r>
+              <a:rPr lang="en-US" sz="3600" b="1" dirty="0">
+                <a:solidFill>
+                  <a:srgbClr val="990011"/>
+                </a:solidFill>
+                <a:latin typeface="Times New Roman" pitchFamily="34" charset="0"/>
+                <a:ea typeface="Times New Roman" pitchFamily="34" charset="-122"/>
+                <a:cs typeface="Times New Roman" pitchFamily="34" charset="-120"/>
+              </a:rPr>
+              <a:t>Homework</a:t>
+            </a:r>
+            <a:endParaRPr lang="en-US" sz="3600" dirty="0"/>
+          </a:p>
+        </p:txBody>
+      </p:sp>
+      <p:sp>
+        <p:nvSpPr>
+          <p:cNvPr id="5" name="Text 2"/>
+          <p:cNvSpPr/>
+          <p:nvPr/>
+        </p:nvSpPr>
+        <p:spPr>
+          <a:xfrm>
+            <a:off x="5349240" y="1783080"/>
+            <a:ext cx="6522415" cy="4663440"/>
+          </a:xfrm>
+          <a:prstGeom prst="rect">
+            <a:avLst/>
+          </a:prstGeom>
+          <a:noFill/>
+          <a:ln/>
+        </p:spPr>
+        <p:txBody>
+          <a:bodyPr wrap="square" lIns="0" tIns="0" rIns="0" bIns="0" rtlCol="0" anchor="t"/>
+          <a:lstStyle/>
+          <a:p>
+            <a:pPr algn="l" indent="0" marL="0">
+              <a:spcAft>
+                <a:spcPts val="800"/>
+              </a:spcAft>
+              <a:buNone/>
+            </a:pPr>
+            <a:r>
+              <a:rPr lang="en-US" sz="4000" dirty="0">
+                <a:solidFill>
+                  <a:srgbClr val="111111"/>
+                </a:solidFill>
+                <a:latin typeface="Times New Roman" pitchFamily="34" charset="0"/>
+                <a:ea typeface="Times New Roman" pitchFamily="34" charset="-122"/>
+                <a:cs typeface="Times New Roman" pitchFamily="34" charset="-120"/>
+              </a:rPr>
+              <a:t>List four services that your family uses every week, for example transport, school, hospital, market or mobile money.</a:t>
+            </a:r>
+            <a:endParaRPr lang="en-US" sz="4000" dirty="0"/>
+          </a:p>
+        </p:txBody>
+      </p:sp>
+      <p:sp>
+        <p:nvSpPr>
+          <p:cNvPr id="25" name="Slide Number Placeholder 0"/>
+          <p:cNvSpPr>
+            <a:spLocks noGrp="1"/>
+          </p:cNvSpPr>
+          <p:nvPr>
+            <p:ph type="sldNum" sz="quarter" idx="4294967295"/>
+          </p:nvPr>
+        </p:nvSpPr>
+        <p:spPr>
+          <a:xfrm>
+            <a:off x="27432" y="91440"/>
+            <a:ext cx="585216" cy="475488"/>
+          </a:xfrm>
+          <a:prstGeom prst="rect">
+            <a:avLst/>
+          </a:prstGeom>
+          <a:extLst>
+            <a:ext uri="{C572A759-6A51-4108-AA02-DFA0A04FC94B}">
+              <ma14:wrappingTextBoxFlag xmlns:ma14="http://schemas.microsoft.com/office/mac/drawingml/2011/main" val="0"/>
+            </a:ext>
+          </a:extLst>
+        </p:spPr>
+        <p:txBody>
+          <a:bodyPr/>
+          <a:lstStyle>
+            <a:lvl1pPr>
+              <a:defRPr sz="2000">
+                <a:solidFill>
+                  <a:srgbClr val="FFFFFF"/>
+                </a:solidFill>
+                <a:latin typeface="Calibri"/>
+                <a:ea typeface="Calibri"/>
+                <a:cs typeface="Calibri"/>
+              </a:defRPr>
+            </a:lvl1pPr>
+          </a:lstStyle>
+          <a:p>
+            <a:pPr algn="ctr"/>
+            <a:fld id="{F7021451-1387-4CA6-816F-3879F97B5CBC}" type="slidenum">
+              <a:rPr b="1" lang="en-US"/>
+              <a:t>45</a:t>
+            </a:fld>
+            <a:endParaRPr lang="en-US"/>
+          </a:p>
+        </p:txBody>
+      </p:sp>
+    </p:spTree>
+  </p:cSld>
+  <p:clrMapOvr>
+    <a:masterClrMapping/>
+  </p:clrMapOvr>
+</p:sld>
+</file>
+
+<file path=ppt/slides/slide46.xml><?xml version="1.0" encoding="utf-8"?>
+<p:sld xmlns:a="http://schemas.openxmlformats.org/drawingml/2006/main" xmlns:r="http://schemas.openxmlformats.org/officeDocument/2006/relationships" xmlns:p="http://schemas.openxmlformats.org/presentationml/2006/main">
+  <p:cSld name="Slide 46">
+    <p:spTree>
+      <p:nvGrpSpPr>
+        <p:cNvPr id="1" name=""/>
+        <p:cNvGrpSpPr/>
+        <p:nvPr/>
+      </p:nvGrpSpPr>
+      <p:grpSpPr>
+        <a:xfrm>
+          <a:off x="0" y="0"/>
+          <a:ext cx="0" cy="0"/>
+          <a:chOff x="0" y="0"/>
+          <a:chExt cx="0" cy="0"/>
+        </a:xfrm>
+      </p:grpSpPr>
+      <p:sp>
+        <p:nvSpPr>
+          <p:cNvPr id="2" name="Text 0"/>
+          <p:cNvSpPr/>
+          <p:nvPr/>
+        </p:nvSpPr>
+        <p:spPr>
+          <a:xfrm>
+            <a:off x="457200" y="713232"/>
+            <a:ext cx="11368735" cy="274320"/>
+          </a:xfrm>
+          <a:prstGeom prst="rect">
+            <a:avLst/>
+          </a:prstGeom>
+          <a:noFill/>
+          <a:ln/>
+        </p:spPr>
+        <p:txBody>
+          <a:bodyPr wrap="square" lIns="0" tIns="0" rIns="0" bIns="0" rtlCol="0" anchor="ctr"/>
+          <a:lstStyle/>
+          <a:p>
+            <a:pPr algn="r" indent="0" marL="0">
+              <a:buNone/>
+            </a:pPr>
+            <a:r>
+              <a:rPr lang="en-US" sz="1400" b="1" dirty="0">
+                <a:solidFill>
+                  <a:srgbClr val="1C3F6E"/>
+                </a:solidFill>
+                <a:latin typeface="Calibri" pitchFamily="34" charset="0"/>
+                <a:ea typeface="Calibri" pitchFamily="34" charset="-122"/>
+                <a:cs typeface="Calibri" pitchFamily="34" charset="-120"/>
+              </a:rPr>
+              <a:t>NEXT LESSON</a:t>
+            </a:r>
+            <a:endParaRPr lang="en-US" sz="1400" dirty="0"/>
+          </a:p>
+        </p:txBody>
+      </p:sp>
+      <p:pic>
+        <p:nvPicPr>
+          <p:cNvPr id="3" name="Image 0" descr="/home/claude/f4/img/minesec_sheet.png">    </p:cNvPr>
+          <p:cNvPicPr>
+            <a:picLocks noChangeAspect="1"/>
+          </p:cNvPicPr>
+          <p:nvPr/>
+        </p:nvPicPr>
+        <p:blipFill>
+          <a:blip r:embed="rId1"/>
+          <a:stretch>
+            <a:fillRect/>
+          </a:stretch>
+        </p:blipFill>
+        <p:spPr>
+          <a:xfrm>
+            <a:off x="0" y="658368"/>
+            <a:ext cx="5120640" cy="5833872"/>
+          </a:xfrm>
+          <a:prstGeom prst="rect">
+            <a:avLst/>
+          </a:prstGeom>
+        </p:spPr>
+      </p:pic>
+      <p:sp>
+        <p:nvSpPr>
+          <p:cNvPr id="4" name="Text 1"/>
+          <p:cNvSpPr/>
+          <p:nvPr/>
+        </p:nvSpPr>
+        <p:spPr>
+          <a:xfrm>
+            <a:off x="5349240" y="1005840"/>
+            <a:ext cx="6522415" cy="731520"/>
+          </a:xfrm>
+          <a:prstGeom prst="rect">
+            <a:avLst/>
+          </a:prstGeom>
+          <a:noFill/>
+          <a:ln/>
+        </p:spPr>
+        <p:txBody>
+          <a:bodyPr wrap="square" lIns="0" tIns="0" rIns="0" bIns="0" rtlCol="0" anchor="ctr">
+            <a:normAutofit/>
+          </a:bodyPr>
+          <a:lstStyle/>
+          <a:p>
+            <a:pPr algn="ctr" indent="0" marL="0">
+              <a:buNone/>
+            </a:pPr>
+            <a:r>
+              <a:rPr lang="en-US" sz="3600" b="1" dirty="0">
+                <a:solidFill>
+                  <a:srgbClr val="990011"/>
+                </a:solidFill>
+                <a:latin typeface="Times New Roman" pitchFamily="34" charset="0"/>
+                <a:ea typeface="Times New Roman" pitchFamily="34" charset="-122"/>
+                <a:cs typeface="Times New Roman" pitchFamily="34" charset="-120"/>
+              </a:rPr>
+              <a:t>Next Lesson</a:t>
+            </a:r>
+            <a:endParaRPr lang="en-US" sz="3600" dirty="0"/>
+          </a:p>
+        </p:txBody>
+      </p:sp>
+      <p:sp>
+        <p:nvSpPr>
+          <p:cNvPr id="5" name="Text 2"/>
+          <p:cNvSpPr/>
+          <p:nvPr/>
+        </p:nvSpPr>
+        <p:spPr>
+          <a:xfrm>
+            <a:off x="5349240" y="1783080"/>
+            <a:ext cx="6522415" cy="4663440"/>
+          </a:xfrm>
+          <a:prstGeom prst="rect">
+            <a:avLst/>
+          </a:prstGeom>
+          <a:noFill/>
+          <a:ln/>
+        </p:spPr>
+        <p:txBody>
+          <a:bodyPr wrap="square" lIns="0" tIns="0" rIns="0" bIns="0" rtlCol="0" anchor="ctr"/>
+          <a:lstStyle/>
+          <a:p>
+            <a:pPr algn="ctr" indent="0" marL="0">
+              <a:spcAft>
+                <a:spcPts val="800"/>
+              </a:spcAft>
+              <a:buNone/>
+            </a:pPr>
+            <a:r>
+              <a:rPr lang="en-US" sz="4000" b="1" dirty="0">
+                <a:solidFill>
+                  <a:srgbClr val="111111"/>
+                </a:solidFill>
+                <a:latin typeface="Times New Roman" pitchFamily="34" charset="0"/>
+                <a:ea typeface="Times New Roman" pitchFamily="34" charset="-122"/>
+                <a:cs typeface="Times New Roman" pitchFamily="34" charset="-120"/>
+              </a:rPr>
+              <a:t>Our next lesson will be on:</a:t>
+            </a:r>
+            <a:endParaRPr lang="en-US" sz="4000" dirty="0"/>
+          </a:p>
+          <a:p>
+            <a:pPr algn="ctr" indent="0" marL="0">
+              <a:spcAft>
+                <a:spcPts val="800"/>
+              </a:spcAft>
+              <a:buNone/>
+            </a:pPr>
+            <a:r>
+              <a:rPr lang="en-US" sz="4000" b="1" dirty="0">
+                <a:solidFill>
+                  <a:srgbClr val="990011"/>
+                </a:solidFill>
+                <a:latin typeface="Times New Roman" pitchFamily="34" charset="0"/>
+                <a:ea typeface="Times New Roman" pitchFamily="34" charset="-122"/>
+                <a:cs typeface="Times New Roman" pitchFamily="34" charset="-120"/>
+              </a:rPr>
+              <a:t>Lesson 5 (Part 5): The Sectors of the Economy: The Tertiary Sector (Definition and Examples)</a:t>
+            </a:r>
+            <a:endParaRPr lang="en-US" sz="4000" dirty="0"/>
+          </a:p>
+        </p:txBody>
+      </p:sp>
+      <p:sp>
+        <p:nvSpPr>
+          <p:cNvPr id="25" name="Slide Number Placeholder 0"/>
+          <p:cNvSpPr>
+            <a:spLocks noGrp="1"/>
+          </p:cNvSpPr>
+          <p:nvPr>
+            <p:ph type="sldNum" sz="quarter" idx="4294967295"/>
+          </p:nvPr>
+        </p:nvSpPr>
+        <p:spPr>
+          <a:xfrm>
+            <a:off x="27432" y="91440"/>
+            <a:ext cx="585216" cy="475488"/>
+          </a:xfrm>
+          <a:prstGeom prst="rect">
+            <a:avLst/>
+          </a:prstGeom>
+          <a:extLst>
+            <a:ext uri="{C572A759-6A51-4108-AA02-DFA0A04FC94B}">
+              <ma14:wrappingTextBoxFlag xmlns:ma14="http://schemas.microsoft.com/office/mac/drawingml/2011/main" val="0"/>
+            </a:ext>
+          </a:extLst>
+        </p:spPr>
+        <p:txBody>
+          <a:bodyPr/>
+          <a:lstStyle>
+            <a:lvl1pPr>
+              <a:defRPr sz="2000">
+                <a:solidFill>
+                  <a:srgbClr val="FFFFFF"/>
+                </a:solidFill>
+                <a:latin typeface="Calibri"/>
+                <a:ea typeface="Calibri"/>
+                <a:cs typeface="Calibri"/>
+              </a:defRPr>
+            </a:lvl1pPr>
+          </a:lstStyle>
+          <a:p>
+            <a:pPr algn="ctr"/>
+            <a:fld id="{F7021451-1387-4CA6-816F-3879F97B5CBC}" type="slidenum">
+              <a:rPr b="1" lang="en-US"/>
+              <a:t>46</a:t>
+            </a:fld>
+            <a:endParaRPr lang="en-US"/>
+          </a:p>
+        </p:txBody>
+      </p:sp>
+    </p:spTree>
+  </p:cSld>
+  <p:clrMapOvr>
+    <a:masterClrMapping/>
+  </p:clrMapOvr>
+</p:sld>
+</file>
+
+<file path=ppt/slides/slide47.xml><?xml version="1.0" encoding="utf-8"?>
+<p:sld xmlns:a="http://schemas.openxmlformats.org/drawingml/2006/main" xmlns:r="http://schemas.openxmlformats.org/officeDocument/2006/relationships" xmlns:p="http://schemas.openxmlformats.org/presentationml/2006/main">
+  <p:cSld name="Slide 47">
+    <p:spTree>
+      <p:nvGrpSpPr>
+        <p:cNvPr id="1" name=""/>
+        <p:cNvGrpSpPr/>
+        <p:nvPr/>
+      </p:nvGrpSpPr>
+      <p:grpSpPr>
+        <a:xfrm>
+          <a:off x="0" y="0"/>
+          <a:ext cx="0" cy="0"/>
+          <a:chOff x="0" y="0"/>
+          <a:chExt cx="0" cy="0"/>
+        </a:xfrm>
+      </p:grpSpPr>
+      <p:sp>
+        <p:nvSpPr>
+          <p:cNvPr id="2" name="Text 0"/>
+          <p:cNvSpPr/>
+          <p:nvPr/>
+        </p:nvSpPr>
+        <p:spPr>
+          <a:xfrm>
+            <a:off x="457200" y="713232"/>
+            <a:ext cx="11368735" cy="274320"/>
+          </a:xfrm>
+          <a:prstGeom prst="rect">
+            <a:avLst/>
+          </a:prstGeom>
+          <a:noFill/>
+          <a:ln/>
+        </p:spPr>
+        <p:txBody>
+          <a:bodyPr wrap="square" lIns="0" tIns="0" rIns="0" bIns="0" rtlCol="0" anchor="ctr"/>
+          <a:lstStyle/>
+          <a:p>
+            <a:pPr algn="r" indent="0" marL="0">
+              <a:buNone/>
+            </a:pPr>
+            <a:r>
+              <a:rPr lang="en-US" sz="1400" b="1" dirty="0">
+                <a:solidFill>
+                  <a:srgbClr val="1C3F6E"/>
+                </a:solidFill>
+                <a:latin typeface="Calibri" pitchFamily="34" charset="0"/>
+                <a:ea typeface="Calibri" pitchFamily="34" charset="-122"/>
+                <a:cs typeface="Calibri" pitchFamily="34" charset="-120"/>
+              </a:rPr>
               <a:t>BILINGUAL GAME</a:t>
             </a:r>
             <a:endParaRPr lang="en-US" sz="1400" dirty="0"/>
@@ -15718,7 +16713,7 @@
       </p:sp>
       <p:graphicFrame>
         <p:nvGraphicFramePr>
-          <p:cNvPr id="45" name="Table 0"/>
+          <p:cNvPr id="48" name="Table 0"/>
           <p:cNvGraphicFramePr>
             <a:graphicFrameLocks noGrp="1"/>
           </p:cNvGraphicFramePr>
@@ -17030,7 +18025,7 @@
             <a:pPr algn="ctr"/>
             <a:fld id="{F7021451-1387-4CA6-816F-3879F97B5CBC}" type="slidenum">
               <a:rPr b="1" lang="en-US"/>
-              <a:t>44</a:t>
+              <a:t>47</a:t>
             </a:fld>
             <a:endParaRPr lang="en-US"/>
           </a:p>
@@ -17044,9 +18039,9 @@
 </p:sld>
 </file>
 
-<file path=ppt/slides/slide45.xml><?xml version="1.0" encoding="utf-8"?>
+<file path=ppt/slides/slide48.xml><?xml version="1.0" encoding="utf-8"?>
 <p:sld xmlns:a="http://schemas.openxmlformats.org/drawingml/2006/main" xmlns:r="http://schemas.openxmlformats.org/officeDocument/2006/relationships" xmlns:p="http://schemas.openxmlformats.org/presentationml/2006/main">
-  <p:cSld name="Slide 45">
+  <p:cSld name="Slide 48">
     <p:spTree>
       <p:nvGrpSpPr>
         <p:cNvPr id="1" name=""/>
@@ -17141,7 +18136,7 @@
       </p:sp>
       <p:graphicFrame>
         <p:nvGraphicFramePr>
-          <p:cNvPr id="46" name="Table 0"/>
+          <p:cNvPr id="49" name="Table 0"/>
           <p:cNvGraphicFramePr>
             <a:graphicFrameLocks noGrp="1"/>
           </p:cNvGraphicFramePr>
@@ -17763,7 +18758,7 @@
             <a:pPr algn="ctr"/>
             <a:fld id="{F7021451-1387-4CA6-816F-3879F97B5CBC}" type="slidenum">
               <a:rPr b="1" lang="en-US"/>
-              <a:t>45</a:t>
+              <a:t>48</a:t>
             </a:fld>
             <a:endParaRPr lang="en-US"/>
           </a:p>
@@ -17777,9 +18772,9 @@
 </p:sld>
 </file>
 
-<file path=ppt/slides/slide46.xml><?xml version="1.0" encoding="utf-8"?>
+<file path=ppt/slides/slide49.xml><?xml version="1.0" encoding="utf-8"?>
 <p:sld xmlns:a="http://schemas.openxmlformats.org/drawingml/2006/main" xmlns:r="http://schemas.openxmlformats.org/officeDocument/2006/relationships" xmlns:p="http://schemas.openxmlformats.org/presentationml/2006/main">
-  <p:cSld name="Slide 46">
+  <p:cSld name="Slide 49">
     <p:spTree>
       <p:nvGrpSpPr>
         <p:cNvPr id="1" name=""/>
@@ -17874,7 +18869,7 @@
       </p:sp>
       <p:graphicFrame>
         <p:nvGraphicFramePr>
-          <p:cNvPr id="47" name="Table 0"/>
+          <p:cNvPr id="50" name="Table 0"/>
           <p:cNvGraphicFramePr>
             <a:graphicFrameLocks noGrp="1"/>
           </p:cNvGraphicFramePr>
@@ -17984,7 +18979,7 @@
                           <a:ea typeface="Calibri" pitchFamily="34" charset="-122"/>
                           <a:cs typeface="Calibri" pitchFamily="34" charset="-120"/>
                         </a:rPr>
-                        <a:t>Meaning of the Secondary Sector; Examples of the Secondary Sector.</a:t>
+                        <a:t>DEFINITIONS; Examples of Secondary Activities.</a:t>
                       </a:r>
                       <a:endParaRPr lang="en-US" sz="1600" dirty="0">
                         <a:latin typeface="Calibri" charset="0"/>
@@ -18634,678 +19629,7 @@
             <a:pPr algn="ctr"/>
             <a:fld id="{F7021451-1387-4CA6-816F-3879F97B5CBC}" type="slidenum">
               <a:rPr b="1" lang="en-US"/>
-              <a:t>46</a:t>
-            </a:fld>
-            <a:endParaRPr lang="en-US"/>
-          </a:p>
-        </p:txBody>
-      </p:sp>
-    </p:spTree>
-  </p:cSld>
-  <p:clrMapOvr>
-    <a:masterClrMapping/>
-  </p:clrMapOvr>
-</p:sld>
-</file>
-
-<file path=ppt/slides/slide47.xml><?xml version="1.0" encoding="utf-8"?>
-<p:sld xmlns:a="http://schemas.openxmlformats.org/drawingml/2006/main" xmlns:r="http://schemas.openxmlformats.org/officeDocument/2006/relationships" xmlns:p="http://schemas.openxmlformats.org/presentationml/2006/main">
-  <p:cSld name="Slide 47">
-    <p:spTree>
-      <p:nvGrpSpPr>
-        <p:cNvPr id="1" name=""/>
-        <p:cNvGrpSpPr/>
-        <p:nvPr/>
-      </p:nvGrpSpPr>
-      <p:grpSpPr>
-        <a:xfrm>
-          <a:off x="0" y="0"/>
-          <a:ext cx="0" cy="0"/>
-          <a:chOff x="0" y="0"/>
-          <a:chExt cx="0" cy="0"/>
-        </a:xfrm>
-      </p:grpSpPr>
-      <p:sp>
-        <p:nvSpPr>
-          <p:cNvPr id="2" name="Text 0"/>
-          <p:cNvSpPr/>
-          <p:nvPr/>
-        </p:nvSpPr>
-        <p:spPr>
-          <a:xfrm>
-            <a:off x="457200" y="713232"/>
-            <a:ext cx="11368735" cy="274320"/>
-          </a:xfrm>
-          <a:prstGeom prst="rect">
-            <a:avLst/>
-          </a:prstGeom>
-          <a:noFill/>
-          <a:ln/>
-        </p:spPr>
-        <p:txBody>
-          <a:bodyPr wrap="square" lIns="0" tIns="0" rIns="0" bIns="0" rtlCol="0" anchor="ctr"/>
-          <a:lstStyle/>
-          <a:p>
-            <a:pPr algn="r" indent="0" marL="0">
-              <a:buNone/>
-            </a:pPr>
-            <a:r>
-              <a:rPr lang="en-US" sz="1400" b="1" dirty="0">
-                <a:solidFill>
-                  <a:srgbClr val="1C3F6E"/>
-                </a:solidFill>
-                <a:latin typeface="Calibri" pitchFamily="34" charset="0"/>
-                <a:ea typeface="Calibri" pitchFamily="34" charset="-122"/>
-                <a:cs typeface="Calibri" pitchFamily="34" charset="-120"/>
-              </a:rPr>
-              <a:t>TEACHER'S NOTE</a:t>
-            </a:r>
-            <a:endParaRPr lang="en-US" sz="1400" dirty="0"/>
-          </a:p>
-        </p:txBody>
-      </p:sp>
-      <p:pic>
-        <p:nvPicPr>
-          <p:cNvPr id="3" name="Image 0" descr="/home/claude/f4/img/minesec_sheet.png">    </p:cNvPr>
-          <p:cNvPicPr>
-            <a:picLocks noChangeAspect="1"/>
-          </p:cNvPicPr>
-          <p:nvPr/>
-        </p:nvPicPr>
-        <p:blipFill>
-          <a:blip r:embed="rId1"/>
-          <a:stretch>
-            <a:fillRect/>
-          </a:stretch>
-        </p:blipFill>
-        <p:spPr>
-          <a:xfrm>
-            <a:off x="0" y="658368"/>
-            <a:ext cx="2468880" cy="5833872"/>
-          </a:xfrm>
-          <a:prstGeom prst="rect">
-            <a:avLst/>
-          </a:prstGeom>
-        </p:spPr>
-      </p:pic>
-      <p:sp>
-        <p:nvSpPr>
-          <p:cNvPr id="4" name="Text 1"/>
-          <p:cNvSpPr/>
-          <p:nvPr/>
-        </p:nvSpPr>
-        <p:spPr>
-          <a:xfrm>
-            <a:off x="2697480" y="1005840"/>
-            <a:ext cx="9174175" cy="731520"/>
-          </a:xfrm>
-          <a:prstGeom prst="rect">
-            <a:avLst/>
-          </a:prstGeom>
-          <a:noFill/>
-          <a:ln/>
-        </p:spPr>
-        <p:txBody>
-          <a:bodyPr wrap="square" lIns="0" tIns="0" rIns="0" bIns="0" rtlCol="0" anchor="ctr">
-            <a:normAutofit/>
-          </a:bodyPr>
-          <a:lstStyle/>
-          <a:p>
-            <a:pPr algn="ctr" indent="0" marL="0">
-              <a:buNone/>
-            </a:pPr>
-            <a:r>
-              <a:rPr lang="en-US" sz="3600" b="1" dirty="0">
-                <a:solidFill>
-                  <a:srgbClr val="990011"/>
-                </a:solidFill>
-                <a:latin typeface="Times New Roman" pitchFamily="34" charset="0"/>
-                <a:ea typeface="Times New Roman" pitchFamily="34" charset="-122"/>
-                <a:cs typeface="Times New Roman" pitchFamily="34" charset="-120"/>
-              </a:rPr>
-              <a:t>Teacher's Note</a:t>
-            </a:r>
-            <a:endParaRPr lang="en-US" sz="3600" dirty="0"/>
-          </a:p>
-        </p:txBody>
-      </p:sp>
-      <p:sp>
-        <p:nvSpPr>
-          <p:cNvPr id="5" name="Text 2"/>
-          <p:cNvSpPr/>
-          <p:nvPr/>
-        </p:nvSpPr>
-        <p:spPr>
-          <a:xfrm>
-            <a:off x="2697480" y="1783080"/>
-            <a:ext cx="9174175" cy="4663440"/>
-          </a:xfrm>
-          <a:prstGeom prst="rect">
-            <a:avLst/>
-          </a:prstGeom>
-          <a:noFill/>
-          <a:ln/>
-        </p:spPr>
-        <p:txBody>
-          <a:bodyPr wrap="square" lIns="0" tIns="0" rIns="0" bIns="0" rtlCol="0" anchor="t"/>
-          <a:lstStyle/>
-          <a:p>
-            <a:pPr algn="l" marL="342900" indent="-342900">
-              <a:spcAft>
-                <a:spcPts val="800"/>
-              </a:spcAft>
-              <a:buSzPct val="100000"/>
-              <a:buChar char="•"/>
-            </a:pPr>
-            <a:r>
-              <a:rPr lang="en-US" sz="2000" dirty="0">
-                <a:solidFill>
-                  <a:srgbClr val="111111"/>
-                </a:solidFill>
-                <a:latin typeface="Calibri" pitchFamily="34" charset="0"/>
-                <a:ea typeface="Calibri" pitchFamily="34" charset="-122"/>
-                <a:cs typeface="Calibri" pitchFamily="34" charset="-120"/>
-              </a:rPr>
-              <a:t>Timing: Homework correction, plan, objectives 8 min | Recall, situation, action 10 min | 5 activities 30 min | Board summary (copying) 30 min | Evaluation, remediation 10 min | Homework, next lesson 5 min | Logbook 7 min</a:t>
-            </a:r>
-            <a:endParaRPr lang="en-US" sz="2000" dirty="0"/>
-          </a:p>
-          <a:p>
-            <a:pPr algn="l" marL="342900" indent="-342900">
-              <a:spcAft>
-                <a:spcPts val="800"/>
-              </a:spcAft>
-              <a:buSzPct val="100000"/>
-              <a:buChar char="•"/>
-            </a:pPr>
-            <a:r>
-              <a:rPr lang="en-US" sz="2000" dirty="0">
-                <a:solidFill>
-                  <a:srgbClr val="111111"/>
-                </a:solidFill>
-                <a:latin typeface="Calibri" pitchFamily="34" charset="0"/>
-                <a:ea typeface="Calibri" pitchFamily="34" charset="-122"/>
-                <a:cs typeface="Calibri" pitchFamily="34" charset="-120"/>
-              </a:rPr>
-              <a:t>Without the projector (Activity 1): show raw cotton and a piece of cloth.</a:t>
-            </a:r>
-            <a:endParaRPr lang="en-US" sz="2000" dirty="0"/>
-          </a:p>
-          <a:p>
-            <a:pPr algn="l" marL="342900" indent="-342900">
-              <a:spcAft>
-                <a:spcPts val="800"/>
-              </a:spcAft>
-              <a:buSzPct val="100000"/>
-              <a:buChar char="•"/>
-            </a:pPr>
-            <a:r>
-              <a:rPr lang="en-US" sz="2000" dirty="0">
-                <a:solidFill>
-                  <a:srgbClr val="111111"/>
-                </a:solidFill>
-                <a:latin typeface="Calibri" pitchFamily="34" charset="0"/>
-                <a:ea typeface="Calibri" pitchFamily="34" charset="-122"/>
-                <a:cs typeface="Calibri" pitchFamily="34" charset="-120"/>
-              </a:rPr>
-              <a:t>Without the projector (Activity 2): ask learners which products are made in Garoua.</a:t>
-            </a:r>
-            <a:endParaRPr lang="en-US" sz="2000" dirty="0"/>
-          </a:p>
-          <a:p>
-            <a:pPr algn="l" marL="342900" indent="-342900">
-              <a:spcAft>
-                <a:spcPts val="800"/>
-              </a:spcAft>
-              <a:buSzPct val="100000"/>
-              <a:buChar char="•"/>
-            </a:pPr>
-            <a:r>
-              <a:rPr lang="en-US" sz="2000" dirty="0">
-                <a:solidFill>
-                  <a:srgbClr val="111111"/>
-                </a:solidFill>
-                <a:latin typeface="Calibri" pitchFamily="34" charset="0"/>
-                <a:ea typeface="Calibri" pitchFamily="34" charset="-122"/>
-                <a:cs typeface="Calibri" pitchFamily="34" charset="-120"/>
-              </a:rPr>
-              <a:t>Without the projector (Activity 3): show a cooking pot made of aluminium.</a:t>
-            </a:r>
-            <a:endParaRPr lang="en-US" sz="2000" dirty="0"/>
-          </a:p>
-          <a:p>
-            <a:pPr algn="l" marL="342900" indent="-342900">
-              <a:spcAft>
-                <a:spcPts val="800"/>
-              </a:spcAft>
-              <a:buSzPct val="100000"/>
-              <a:buChar char="•"/>
-            </a:pPr>
-            <a:r>
-              <a:rPr lang="en-US" sz="2000" dirty="0">
-                <a:solidFill>
-                  <a:srgbClr val="111111"/>
-                </a:solidFill>
-                <a:latin typeface="Calibri" pitchFamily="34" charset="0"/>
-                <a:ea typeface="Calibri" pitchFamily="34" charset="-122"/>
-                <a:cs typeface="Calibri" pitchFamily="34" charset="-120"/>
-              </a:rPr>
-              <a:t>Without the projector (Activity 4): ask learners to name buildings under construction in Garoua.</a:t>
-            </a:r>
-            <a:endParaRPr lang="en-US" sz="2000" dirty="0"/>
-          </a:p>
-          <a:p>
-            <a:pPr algn="l" marL="342900" indent="-342900">
-              <a:spcAft>
-                <a:spcPts val="800"/>
-              </a:spcAft>
-              <a:buSzPct val="100000"/>
-              <a:buChar char="•"/>
-            </a:pPr>
-            <a:r>
-              <a:rPr lang="en-US" sz="2000" dirty="0">
-                <a:solidFill>
-                  <a:srgbClr val="111111"/>
-                </a:solidFill>
-                <a:latin typeface="Calibri" pitchFamily="34" charset="0"/>
-                <a:ea typeface="Calibri" pitchFamily="34" charset="-122"/>
-                <a:cs typeface="Calibri" pitchFamily="34" charset="-120"/>
-              </a:rPr>
-              <a:t>Without the projector (Activity 5): ask learners to name craftsmen: tailors, potters, carpenters.</a:t>
-            </a:r>
-            <a:endParaRPr lang="en-US" sz="2000" dirty="0"/>
-          </a:p>
-        </p:txBody>
-      </p:sp>
-      <p:sp>
-        <p:nvSpPr>
-          <p:cNvPr id="25" name="Slide Number Placeholder 0"/>
-          <p:cNvSpPr>
-            <a:spLocks noGrp="1"/>
-          </p:cNvSpPr>
-          <p:nvPr>
-            <p:ph type="sldNum" sz="quarter" idx="4294967295"/>
-          </p:nvPr>
-        </p:nvSpPr>
-        <p:spPr>
-          <a:xfrm>
-            <a:off x="27432" y="91440"/>
-            <a:ext cx="585216" cy="475488"/>
-          </a:xfrm>
-          <a:prstGeom prst="rect">
-            <a:avLst/>
-          </a:prstGeom>
-          <a:extLst>
-            <a:ext uri="{C572A759-6A51-4108-AA02-DFA0A04FC94B}">
-              <ma14:wrappingTextBoxFlag xmlns:ma14="http://schemas.microsoft.com/office/mac/drawingml/2011/main" val="0"/>
-            </a:ext>
-          </a:extLst>
-        </p:spPr>
-        <p:txBody>
-          <a:bodyPr/>
-          <a:lstStyle>
-            <a:lvl1pPr>
-              <a:defRPr sz="2000">
-                <a:solidFill>
-                  <a:srgbClr val="FFFFFF"/>
-                </a:solidFill>
-                <a:latin typeface="Calibri"/>
-                <a:ea typeface="Calibri"/>
-                <a:cs typeface="Calibri"/>
-              </a:defRPr>
-            </a:lvl1pPr>
-          </a:lstStyle>
-          <a:p>
-            <a:pPr algn="ctr"/>
-            <a:fld id="{F7021451-1387-4CA6-816F-3879F97B5CBC}" type="slidenum">
-              <a:rPr b="1" lang="en-US"/>
-              <a:t>47</a:t>
-            </a:fld>
-            <a:endParaRPr lang="en-US"/>
-          </a:p>
-        </p:txBody>
-      </p:sp>
-    </p:spTree>
-  </p:cSld>
-  <p:clrMapOvr>
-    <a:masterClrMapping/>
-  </p:clrMapOvr>
-</p:sld>
-</file>
-
-<file path=ppt/slides/slide48.xml><?xml version="1.0" encoding="utf-8"?>
-<p:sld xmlns:a="http://schemas.openxmlformats.org/drawingml/2006/main" xmlns:r="http://schemas.openxmlformats.org/officeDocument/2006/relationships" xmlns:p="http://schemas.openxmlformats.org/presentationml/2006/main">
-  <p:cSld name="Slide 48">
-    <p:spTree>
-      <p:nvGrpSpPr>
-        <p:cNvPr id="1" name=""/>
-        <p:cNvGrpSpPr/>
-        <p:nvPr/>
-      </p:nvGrpSpPr>
-      <p:grpSpPr>
-        <a:xfrm>
-          <a:off x="0" y="0"/>
-          <a:ext cx="0" cy="0"/>
-          <a:chOff x="0" y="0"/>
-          <a:chExt cx="0" cy="0"/>
-        </a:xfrm>
-      </p:grpSpPr>
-      <p:sp>
-        <p:nvSpPr>
-          <p:cNvPr id="2" name="Text 0"/>
-          <p:cNvSpPr/>
-          <p:nvPr/>
-        </p:nvSpPr>
-        <p:spPr>
-          <a:xfrm>
-            <a:off x="457200" y="713232"/>
-            <a:ext cx="11368735" cy="274320"/>
-          </a:xfrm>
-          <a:prstGeom prst="rect">
-            <a:avLst/>
-          </a:prstGeom>
-          <a:noFill/>
-          <a:ln/>
-        </p:spPr>
-        <p:txBody>
-          <a:bodyPr wrap="square" lIns="0" tIns="0" rIns="0" bIns="0" rtlCol="0" anchor="ctr"/>
-          <a:lstStyle/>
-          <a:p>
-            <a:pPr algn="r" indent="0" marL="0">
-              <a:buNone/>
-            </a:pPr>
-            <a:r>
-              <a:rPr lang="en-US" sz="1400" b="1" dirty="0">
-                <a:solidFill>
-                  <a:srgbClr val="1C3F6E"/>
-                </a:solidFill>
-                <a:latin typeface="Calibri" pitchFamily="34" charset="0"/>
-                <a:ea typeface="Calibri" pitchFamily="34" charset="-122"/>
-                <a:cs typeface="Calibri" pitchFamily="34" charset="-120"/>
-              </a:rPr>
-              <a:t>REFERENCES</a:t>
-            </a:r>
-            <a:endParaRPr lang="en-US" sz="1400" dirty="0"/>
-          </a:p>
-        </p:txBody>
-      </p:sp>
-      <p:pic>
-        <p:nvPicPr>
-          <p:cNvPr id="3" name="Image 0" descr="/home/claude/f4/img/minesec_sheet.png">    </p:cNvPr>
-          <p:cNvPicPr>
-            <a:picLocks noChangeAspect="1"/>
-          </p:cNvPicPr>
-          <p:nvPr/>
-        </p:nvPicPr>
-        <p:blipFill>
-          <a:blip r:embed="rId1"/>
-          <a:stretch>
-            <a:fillRect/>
-          </a:stretch>
-        </p:blipFill>
-        <p:spPr>
-          <a:xfrm>
-            <a:off x="0" y="658368"/>
-            <a:ext cx="1463040" cy="5833872"/>
-          </a:xfrm>
-          <a:prstGeom prst="rect">
-            <a:avLst/>
-          </a:prstGeom>
-        </p:spPr>
-      </p:pic>
-      <p:sp>
-        <p:nvSpPr>
-          <p:cNvPr id="4" name="Text 1"/>
-          <p:cNvSpPr/>
-          <p:nvPr/>
-        </p:nvSpPr>
-        <p:spPr>
-          <a:xfrm>
-            <a:off x="1691640" y="1005840"/>
-            <a:ext cx="10180015" cy="731520"/>
-          </a:xfrm>
-          <a:prstGeom prst="rect">
-            <a:avLst/>
-          </a:prstGeom>
-          <a:noFill/>
-          <a:ln/>
-        </p:spPr>
-        <p:txBody>
-          <a:bodyPr wrap="square" lIns="0" tIns="0" rIns="0" bIns="0" rtlCol="0" anchor="ctr">
-            <a:normAutofit/>
-          </a:bodyPr>
-          <a:lstStyle/>
-          <a:p>
-            <a:pPr algn="ctr" indent="0" marL="0">
-              <a:buNone/>
-            </a:pPr>
-            <a:r>
-              <a:rPr lang="en-US" sz="3600" b="1" dirty="0">
-                <a:solidFill>
-                  <a:srgbClr val="990011"/>
-                </a:solidFill>
-                <a:latin typeface="Times New Roman" pitchFamily="34" charset="0"/>
-                <a:ea typeface="Times New Roman" pitchFamily="34" charset="-122"/>
-                <a:cs typeface="Times New Roman" pitchFamily="34" charset="-120"/>
-              </a:rPr>
-              <a:t>References</a:t>
-            </a:r>
-            <a:endParaRPr lang="en-US" sz="3600" dirty="0"/>
-          </a:p>
-        </p:txBody>
-      </p:sp>
-      <p:sp>
-        <p:nvSpPr>
-          <p:cNvPr id="5" name="Text 2"/>
-          <p:cNvSpPr/>
-          <p:nvPr/>
-        </p:nvSpPr>
-        <p:spPr>
-          <a:xfrm>
-            <a:off x="1691640" y="1783080"/>
-            <a:ext cx="10180015" cy="4663440"/>
-          </a:xfrm>
-          <a:prstGeom prst="rect">
-            <a:avLst/>
-          </a:prstGeom>
-          <a:noFill/>
-          <a:ln/>
-        </p:spPr>
-        <p:txBody>
-          <a:bodyPr wrap="square" lIns="0" tIns="0" rIns="0" bIns="0" rtlCol="0" anchor="t"/>
-          <a:lstStyle/>
-          <a:p>
-            <a:pPr algn="l" marL="342900" indent="-342900">
-              <a:spcAft>
-                <a:spcPts val="800"/>
-              </a:spcAft>
-              <a:buSzPct val="100000"/>
-              <a:buChar char="•"/>
-            </a:pPr>
-            <a:r>
-              <a:rPr lang="en-US" sz="1800" dirty="0">
-                <a:solidFill>
-                  <a:srgbClr val="111111"/>
-                </a:solidFill>
-                <a:latin typeface="Calibri" pitchFamily="34" charset="0"/>
-                <a:ea typeface="Calibri" pitchFamily="34" charset="-122"/>
-                <a:cs typeface="Calibri" pitchFamily="34" charset="-120"/>
-              </a:rPr>
-              <a:t>Harmonised Progression Sheet, Economic Geography (5051), Form 2.</a:t>
-            </a:r>
-            <a:endParaRPr lang="en-US" sz="1800" dirty="0"/>
-          </a:p>
-          <a:p>
-            <a:pPr algn="l" marL="342900" indent="-342900">
-              <a:spcAft>
-                <a:spcPts val="800"/>
-              </a:spcAft>
-              <a:buSzPct val="100000"/>
-              <a:buChar char="•"/>
-            </a:pPr>
-            <a:r>
-              <a:rPr lang="en-US" sz="1800" dirty="0">
-                <a:solidFill>
-                  <a:srgbClr val="111111"/>
-                </a:solidFill>
-                <a:latin typeface="Calibri" pitchFamily="34" charset="0"/>
-                <a:ea typeface="Calibri" pitchFamily="34" charset="-122"/>
-                <a:cs typeface="Calibri" pitchFamily="34" charset="-120"/>
-              </a:rPr>
-              <a:t>Photo, Activity 1: “Lowell Massachusetts - Boott Cotton Mills Museum Weave Room” by Onasill ~ Bill- 81M views, CC BY-NC-SA 2.0, via Flickr (https://www.flickr.com/photos/7156765@N05/43677799854)</a:t>
-            </a:r>
-            <a:endParaRPr lang="en-US" sz="1800" dirty="0"/>
-          </a:p>
-          <a:p>
-            <a:pPr algn="l" marL="342900" indent="-342900">
-              <a:spcAft>
-                <a:spcPts val="800"/>
-              </a:spcAft>
-              <a:buSzPct val="100000"/>
-              <a:buChar char="•"/>
-            </a:pPr>
-            <a:r>
-              <a:rPr lang="en-US" sz="1800" dirty="0">
-                <a:solidFill>
-                  <a:srgbClr val="111111"/>
-                </a:solidFill>
-                <a:latin typeface="Calibri" pitchFamily="34" charset="0"/>
-                <a:ea typeface="Calibri" pitchFamily="34" charset="-122"/>
-                <a:cs typeface="Calibri" pitchFamily="34" charset="-120"/>
-              </a:rPr>
-              <a:t>Photo, Activity 2: “Interior of Winston-Salem Chero-Cola Bottling Company, Winston-Salem, ” by unclibraries_commons, Public domain 1.0, via Flickr (https://www.flickr.com/photos/122654055@N06/22680169228)</a:t>
-            </a:r>
-            <a:endParaRPr lang="en-US" sz="1800" dirty="0"/>
-          </a:p>
-          <a:p>
-            <a:pPr algn="l" marL="342900" indent="-342900">
-              <a:spcAft>
-                <a:spcPts val="800"/>
-              </a:spcAft>
-              <a:buSzPct val="100000"/>
-              <a:buChar char="•"/>
-            </a:pPr>
-            <a:r>
-              <a:rPr lang="en-US" sz="1800" dirty="0">
-                <a:solidFill>
-                  <a:srgbClr val="111111"/>
-                </a:solidFill>
-                <a:latin typeface="Calibri" pitchFamily="34" charset="0"/>
-                <a:ea typeface="Calibri" pitchFamily="34" charset="-122"/>
-                <a:cs typeface="Calibri" pitchFamily="34" charset="-120"/>
-              </a:rPr>
-              <a:t>Photo, Activity 3: “Kurri Kurri aluminium” by yewenyi, CC BY-NC 2.0, via Flickr (https://www.flickr.com/photos/30265340@N00/2971223932)</a:t>
-            </a:r>
-            <a:endParaRPr lang="en-US" sz="1800" dirty="0"/>
-          </a:p>
-          <a:p>
-            <a:pPr algn="l" marL="342900" indent="-342900">
-              <a:spcAft>
-                <a:spcPts val="800"/>
-              </a:spcAft>
-              <a:buSzPct val="100000"/>
-              <a:buChar char="•"/>
-            </a:pPr>
-            <a:r>
-              <a:rPr lang="en-US" sz="1800" dirty="0">
-                <a:solidFill>
-                  <a:srgbClr val="111111"/>
-                </a:solidFill>
-                <a:latin typeface="Calibri" pitchFamily="34" charset="0"/>
-                <a:ea typeface="Calibri" pitchFamily="34" charset="-122"/>
-                <a:cs typeface="Calibri" pitchFamily="34" charset="-120"/>
-              </a:rPr>
-              <a:t>Photo, Activity 4: “Cementing Ethiopia's progress” by DFID - UK Department for International Development, CC BY 2.0, via Flickr (https://www.flickr.com/photos/14214150@N02/8757865770)</a:t>
-            </a:r>
-            <a:endParaRPr lang="en-US" sz="1800" dirty="0"/>
-          </a:p>
-          <a:p>
-            <a:pPr algn="l" marL="342900" indent="-342900">
-              <a:spcAft>
-                <a:spcPts val="800"/>
-              </a:spcAft>
-              <a:buSzPct val="100000"/>
-              <a:buChar char="•"/>
-            </a:pPr>
-            <a:r>
-              <a:rPr lang="en-US" sz="1800" dirty="0">
-                <a:solidFill>
-                  <a:srgbClr val="111111"/>
-                </a:solidFill>
-                <a:latin typeface="Calibri" pitchFamily="34" charset="0"/>
-                <a:ea typeface="Calibri" pitchFamily="34" charset="-122"/>
-                <a:cs typeface="Calibri" pitchFamily="34" charset="-120"/>
-              </a:rPr>
-              <a:t>Photo, Activity 5: “Forging a new spear tip” by www.j-pics.info, CC BY-NC-SA 2.0, via Flickr (https://www.flickr.com/photos/33979630@N07/16024814824)</a:t>
-            </a:r>
-            <a:endParaRPr lang="en-US" sz="1800" dirty="0"/>
-          </a:p>
-          <a:p>
-            <a:pPr algn="l" marL="342900" indent="-342900">
-              <a:spcAft>
-                <a:spcPts val="800"/>
-              </a:spcAft>
-              <a:buSzPct val="100000"/>
-              <a:buChar char="•"/>
-            </a:pPr>
-            <a:r>
-              <a:rPr lang="en-US" sz="1800" dirty="0">
-                <a:solidFill>
-                  <a:srgbClr val="111111"/>
-                </a:solidFill>
-                <a:latin typeface="Calibri" pitchFamily="34" charset="0"/>
-                <a:ea typeface="Calibri" pitchFamily="34" charset="-122"/>
-                <a:cs typeface="Calibri" pitchFamily="34" charset="-120"/>
-              </a:rPr>
-              <a:t>Diagrams and animations: drawn for this lesson (Geography Department).</a:t>
-            </a:r>
-            <a:endParaRPr lang="en-US" sz="1800" dirty="0"/>
-          </a:p>
-        </p:txBody>
-      </p:sp>
-      <p:sp>
-        <p:nvSpPr>
-          <p:cNvPr id="25" name="Slide Number Placeholder 0"/>
-          <p:cNvSpPr>
-            <a:spLocks noGrp="1"/>
-          </p:cNvSpPr>
-          <p:nvPr>
-            <p:ph type="sldNum" sz="quarter" idx="4294967295"/>
-          </p:nvPr>
-        </p:nvSpPr>
-        <p:spPr>
-          <a:xfrm>
-            <a:off x="27432" y="91440"/>
-            <a:ext cx="585216" cy="475488"/>
-          </a:xfrm>
-          <a:prstGeom prst="rect">
-            <a:avLst/>
-          </a:prstGeom>
-          <a:extLst>
-            <a:ext uri="{C572A759-6A51-4108-AA02-DFA0A04FC94B}">
-              <ma14:wrappingTextBoxFlag xmlns:ma14="http://schemas.microsoft.com/office/mac/drawingml/2011/main" val="0"/>
-            </a:ext>
-          </a:extLst>
-        </p:spPr>
-        <p:txBody>
-          <a:bodyPr/>
-          <a:lstStyle>
-            <a:lvl1pPr>
-              <a:defRPr sz="2000">
-                <a:solidFill>
-                  <a:srgbClr val="FFFFFF"/>
-                </a:solidFill>
-                <a:latin typeface="Calibri"/>
-                <a:ea typeface="Calibri"/>
-                <a:cs typeface="Calibri"/>
-              </a:defRPr>
-            </a:lvl1pPr>
-          </a:lstStyle>
-          <a:p>
-            <a:pPr algn="ctr"/>
-            <a:fld id="{F7021451-1387-4CA6-816F-3879F97B5CBC}" type="slidenum">
-              <a:rPr b="1" lang="en-US"/>
-              <a:t>48</a:t>
+              <a:t>49</a:t>
             </a:fld>
             <a:endParaRPr lang="en-US"/>
           </a:p>
@@ -19538,6 +19862,677 @@
 </p:sld>
 </file>
 
+<file path=ppt/slides/slide50.xml><?xml version="1.0" encoding="utf-8"?>
+<p:sld xmlns:a="http://schemas.openxmlformats.org/drawingml/2006/main" xmlns:r="http://schemas.openxmlformats.org/officeDocument/2006/relationships" xmlns:p="http://schemas.openxmlformats.org/presentationml/2006/main">
+  <p:cSld name="Slide 50">
+    <p:spTree>
+      <p:nvGrpSpPr>
+        <p:cNvPr id="1" name=""/>
+        <p:cNvGrpSpPr/>
+        <p:nvPr/>
+      </p:nvGrpSpPr>
+      <p:grpSpPr>
+        <a:xfrm>
+          <a:off x="0" y="0"/>
+          <a:ext cx="0" cy="0"/>
+          <a:chOff x="0" y="0"/>
+          <a:chExt cx="0" cy="0"/>
+        </a:xfrm>
+      </p:grpSpPr>
+      <p:sp>
+        <p:nvSpPr>
+          <p:cNvPr id="2" name="Text 0"/>
+          <p:cNvSpPr/>
+          <p:nvPr/>
+        </p:nvSpPr>
+        <p:spPr>
+          <a:xfrm>
+            <a:off x="457200" y="713232"/>
+            <a:ext cx="11368735" cy="274320"/>
+          </a:xfrm>
+          <a:prstGeom prst="rect">
+            <a:avLst/>
+          </a:prstGeom>
+          <a:noFill/>
+          <a:ln/>
+        </p:spPr>
+        <p:txBody>
+          <a:bodyPr wrap="square" lIns="0" tIns="0" rIns="0" bIns="0" rtlCol="0" anchor="ctr"/>
+          <a:lstStyle/>
+          <a:p>
+            <a:pPr algn="r" indent="0" marL="0">
+              <a:buNone/>
+            </a:pPr>
+            <a:r>
+              <a:rPr lang="en-US" sz="1400" b="1" dirty="0">
+                <a:solidFill>
+                  <a:srgbClr val="1C3F6E"/>
+                </a:solidFill>
+                <a:latin typeface="Calibri" pitchFamily="34" charset="0"/>
+                <a:ea typeface="Calibri" pitchFamily="34" charset="-122"/>
+                <a:cs typeface="Calibri" pitchFamily="34" charset="-120"/>
+              </a:rPr>
+              <a:t>TEACHER'S NOTE</a:t>
+            </a:r>
+            <a:endParaRPr lang="en-US" sz="1400" dirty="0"/>
+          </a:p>
+        </p:txBody>
+      </p:sp>
+      <p:pic>
+        <p:nvPicPr>
+          <p:cNvPr id="3" name="Image 0" descr="/home/claude/f4/img/minesec_sheet.png">    </p:cNvPr>
+          <p:cNvPicPr>
+            <a:picLocks noChangeAspect="1"/>
+          </p:cNvPicPr>
+          <p:nvPr/>
+        </p:nvPicPr>
+        <p:blipFill>
+          <a:blip r:embed="rId1"/>
+          <a:stretch>
+            <a:fillRect/>
+          </a:stretch>
+        </p:blipFill>
+        <p:spPr>
+          <a:xfrm>
+            <a:off x="0" y="658368"/>
+            <a:ext cx="5120640" cy="5833872"/>
+          </a:xfrm>
+          <a:prstGeom prst="rect">
+            <a:avLst/>
+          </a:prstGeom>
+        </p:spPr>
+      </p:pic>
+      <p:sp>
+        <p:nvSpPr>
+          <p:cNvPr id="4" name="Text 1"/>
+          <p:cNvSpPr/>
+          <p:nvPr/>
+        </p:nvSpPr>
+        <p:spPr>
+          <a:xfrm>
+            <a:off x="5349240" y="1005840"/>
+            <a:ext cx="6522415" cy="731520"/>
+          </a:xfrm>
+          <a:prstGeom prst="rect">
+            <a:avLst/>
+          </a:prstGeom>
+          <a:noFill/>
+          <a:ln/>
+        </p:spPr>
+        <p:txBody>
+          <a:bodyPr wrap="square" lIns="0" tIns="0" rIns="0" bIns="0" rtlCol="0" anchor="ctr">
+            <a:normAutofit/>
+          </a:bodyPr>
+          <a:lstStyle/>
+          <a:p>
+            <a:pPr algn="ctr" indent="0" marL="0">
+              <a:buNone/>
+            </a:pPr>
+            <a:r>
+              <a:rPr lang="en-US" sz="3600" b="1" dirty="0">
+                <a:solidFill>
+                  <a:srgbClr val="990011"/>
+                </a:solidFill>
+                <a:latin typeface="Times New Roman" pitchFamily="34" charset="0"/>
+                <a:ea typeface="Times New Roman" pitchFamily="34" charset="-122"/>
+                <a:cs typeface="Times New Roman" pitchFamily="34" charset="-120"/>
+              </a:rPr>
+              <a:t>Teacher's Note</a:t>
+            </a:r>
+            <a:endParaRPr lang="en-US" sz="3600" dirty="0"/>
+          </a:p>
+        </p:txBody>
+      </p:sp>
+      <p:sp>
+        <p:nvSpPr>
+          <p:cNvPr id="5" name="Text 2"/>
+          <p:cNvSpPr/>
+          <p:nvPr/>
+        </p:nvSpPr>
+        <p:spPr>
+          <a:xfrm>
+            <a:off x="5349240" y="1783080"/>
+            <a:ext cx="6522415" cy="4663440"/>
+          </a:xfrm>
+          <a:prstGeom prst="rect">
+            <a:avLst/>
+          </a:prstGeom>
+          <a:noFill/>
+          <a:ln/>
+        </p:spPr>
+        <p:txBody>
+          <a:bodyPr wrap="square" lIns="0" tIns="0" rIns="0" bIns="0" rtlCol="0" anchor="t"/>
+          <a:lstStyle/>
+          <a:p>
+            <a:pPr algn="l" marL="342900" indent="-342900">
+              <a:spcAft>
+                <a:spcPts val="800"/>
+              </a:spcAft>
+              <a:buSzPct val="100000"/>
+              <a:buChar char="•"/>
+            </a:pPr>
+            <a:r>
+              <a:rPr lang="en-US" sz="2000" dirty="0">
+                <a:solidFill>
+                  <a:srgbClr val="111111"/>
+                </a:solidFill>
+                <a:latin typeface="Calibri" pitchFamily="34" charset="0"/>
+                <a:ea typeface="Calibri" pitchFamily="34" charset="-122"/>
+                <a:cs typeface="Calibri" pitchFamily="34" charset="-120"/>
+              </a:rPr>
+              <a:t>Timing: Homework correction, plan, objectives 8 min | Recall, situation, action 10 min | 5 activities 30 min | Board summary (copying) 30 min | Evaluation, remediation 10 min | Homework, next lesson 5 min | Logbook 7 min</a:t>
+            </a:r>
+            <a:endParaRPr lang="en-US" sz="2000" dirty="0"/>
+          </a:p>
+          <a:p>
+            <a:pPr algn="l" marL="342900" indent="-342900">
+              <a:spcAft>
+                <a:spcPts val="800"/>
+              </a:spcAft>
+              <a:buSzPct val="100000"/>
+              <a:buChar char="•"/>
+            </a:pPr>
+            <a:r>
+              <a:rPr lang="en-US" sz="2000" dirty="0">
+                <a:solidFill>
+                  <a:srgbClr val="111111"/>
+                </a:solidFill>
+                <a:latin typeface="Calibri" pitchFamily="34" charset="0"/>
+                <a:ea typeface="Calibri" pitchFamily="34" charset="-122"/>
+                <a:cs typeface="Calibri" pitchFamily="34" charset="-120"/>
+              </a:rPr>
+              <a:t>Without the projector (Activity 1): show cloth.</a:t>
+            </a:r>
+            <a:endParaRPr lang="en-US" sz="2000" dirty="0"/>
+          </a:p>
+          <a:p>
+            <a:pPr algn="l" marL="342900" indent="-342900">
+              <a:spcAft>
+                <a:spcPts val="800"/>
+              </a:spcAft>
+              <a:buSzPct val="100000"/>
+              <a:buChar char="•"/>
+            </a:pPr>
+            <a:r>
+              <a:rPr lang="en-US" sz="2000" dirty="0">
+                <a:solidFill>
+                  <a:srgbClr val="111111"/>
+                </a:solidFill>
+                <a:latin typeface="Calibri" pitchFamily="34" charset="0"/>
+                <a:ea typeface="Calibri" pitchFamily="34" charset="-122"/>
+                <a:cs typeface="Calibri" pitchFamily="34" charset="-120"/>
+              </a:rPr>
+              <a:t>Without the projector (Activity 2): name factories of Garoua.</a:t>
+            </a:r>
+            <a:endParaRPr lang="en-US" sz="2000" dirty="0"/>
+          </a:p>
+          <a:p>
+            <a:pPr algn="l" marL="342900" indent="-342900">
+              <a:spcAft>
+                <a:spcPts val="800"/>
+              </a:spcAft>
+              <a:buSzPct val="100000"/>
+              <a:buChar char="•"/>
+            </a:pPr>
+            <a:r>
+              <a:rPr lang="en-US" sz="2000" dirty="0">
+                <a:solidFill>
+                  <a:srgbClr val="111111"/>
+                </a:solidFill>
+                <a:latin typeface="Calibri" pitchFamily="34" charset="0"/>
+                <a:ea typeface="Calibri" pitchFamily="34" charset="-122"/>
+                <a:cs typeface="Calibri" pitchFamily="34" charset="-120"/>
+              </a:rPr>
+              <a:t>Without the projector (Activity 3): show an aluminium pot.</a:t>
+            </a:r>
+            <a:endParaRPr lang="en-US" sz="2000" dirty="0"/>
+          </a:p>
+          <a:p>
+            <a:pPr algn="l" marL="342900" indent="-342900">
+              <a:spcAft>
+                <a:spcPts val="800"/>
+              </a:spcAft>
+              <a:buSzPct val="100000"/>
+              <a:buChar char="•"/>
+            </a:pPr>
+            <a:r>
+              <a:rPr lang="en-US" sz="2000" dirty="0">
+                <a:solidFill>
+                  <a:srgbClr val="111111"/>
+                </a:solidFill>
+                <a:latin typeface="Calibri" pitchFamily="34" charset="0"/>
+                <a:ea typeface="Calibri" pitchFamily="34" charset="-122"/>
+                <a:cs typeface="Calibri" pitchFamily="34" charset="-120"/>
+              </a:rPr>
+              <a:t>Without the projector (Activity 4): describe a building site.</a:t>
+            </a:r>
+            <a:endParaRPr lang="en-US" sz="2000" dirty="0"/>
+          </a:p>
+          <a:p>
+            <a:pPr algn="l" marL="342900" indent="-342900">
+              <a:spcAft>
+                <a:spcPts val="800"/>
+              </a:spcAft>
+              <a:buSzPct val="100000"/>
+              <a:buChar char="•"/>
+            </a:pPr>
+            <a:r>
+              <a:rPr lang="en-US" sz="2000" dirty="0">
+                <a:solidFill>
+                  <a:srgbClr val="111111"/>
+                </a:solidFill>
+                <a:latin typeface="Calibri" pitchFamily="34" charset="0"/>
+                <a:ea typeface="Calibri" pitchFamily="34" charset="-122"/>
+                <a:cs typeface="Calibri" pitchFamily="34" charset="-120"/>
+              </a:rPr>
+              <a:t>Without the projector (Activity 5): name craftsmen.</a:t>
+            </a:r>
+            <a:endParaRPr lang="en-US" sz="2000" dirty="0"/>
+          </a:p>
+        </p:txBody>
+      </p:sp>
+      <p:sp>
+        <p:nvSpPr>
+          <p:cNvPr id="25" name="Slide Number Placeholder 0"/>
+          <p:cNvSpPr>
+            <a:spLocks noGrp="1"/>
+          </p:cNvSpPr>
+          <p:nvPr>
+            <p:ph type="sldNum" sz="quarter" idx="4294967295"/>
+          </p:nvPr>
+        </p:nvSpPr>
+        <p:spPr>
+          <a:xfrm>
+            <a:off x="27432" y="91440"/>
+            <a:ext cx="585216" cy="475488"/>
+          </a:xfrm>
+          <a:prstGeom prst="rect">
+            <a:avLst/>
+          </a:prstGeom>
+          <a:extLst>
+            <a:ext uri="{C572A759-6A51-4108-AA02-DFA0A04FC94B}">
+              <ma14:wrappingTextBoxFlag xmlns:ma14="http://schemas.microsoft.com/office/mac/drawingml/2011/main" val="0"/>
+            </a:ext>
+          </a:extLst>
+        </p:spPr>
+        <p:txBody>
+          <a:bodyPr/>
+          <a:lstStyle>
+            <a:lvl1pPr>
+              <a:defRPr sz="2000">
+                <a:solidFill>
+                  <a:srgbClr val="FFFFFF"/>
+                </a:solidFill>
+                <a:latin typeface="Calibri"/>
+                <a:ea typeface="Calibri"/>
+                <a:cs typeface="Calibri"/>
+              </a:defRPr>
+            </a:lvl1pPr>
+          </a:lstStyle>
+          <a:p>
+            <a:pPr algn="ctr"/>
+            <a:fld id="{F7021451-1387-4CA6-816F-3879F97B5CBC}" type="slidenum">
+              <a:rPr b="1" lang="en-US"/>
+              <a:t>50</a:t>
+            </a:fld>
+            <a:endParaRPr lang="en-US"/>
+          </a:p>
+        </p:txBody>
+      </p:sp>
+    </p:spTree>
+  </p:cSld>
+  <p:clrMapOvr>
+    <a:masterClrMapping/>
+  </p:clrMapOvr>
+</p:sld>
+</file>
+
+<file path=ppt/slides/slide51.xml><?xml version="1.0" encoding="utf-8"?>
+<p:sld xmlns:a="http://schemas.openxmlformats.org/drawingml/2006/main" xmlns:r="http://schemas.openxmlformats.org/officeDocument/2006/relationships" xmlns:p="http://schemas.openxmlformats.org/presentationml/2006/main">
+  <p:cSld name="Slide 51">
+    <p:spTree>
+      <p:nvGrpSpPr>
+        <p:cNvPr id="1" name=""/>
+        <p:cNvGrpSpPr/>
+        <p:nvPr/>
+      </p:nvGrpSpPr>
+      <p:grpSpPr>
+        <a:xfrm>
+          <a:off x="0" y="0"/>
+          <a:ext cx="0" cy="0"/>
+          <a:chOff x="0" y="0"/>
+          <a:chExt cx="0" cy="0"/>
+        </a:xfrm>
+      </p:grpSpPr>
+      <p:sp>
+        <p:nvSpPr>
+          <p:cNvPr id="2" name="Text 0"/>
+          <p:cNvSpPr/>
+          <p:nvPr/>
+        </p:nvSpPr>
+        <p:spPr>
+          <a:xfrm>
+            <a:off x="457200" y="713232"/>
+            <a:ext cx="11368735" cy="274320"/>
+          </a:xfrm>
+          <a:prstGeom prst="rect">
+            <a:avLst/>
+          </a:prstGeom>
+          <a:noFill/>
+          <a:ln/>
+        </p:spPr>
+        <p:txBody>
+          <a:bodyPr wrap="square" lIns="0" tIns="0" rIns="0" bIns="0" rtlCol="0" anchor="ctr"/>
+          <a:lstStyle/>
+          <a:p>
+            <a:pPr algn="r" indent="0" marL="0">
+              <a:buNone/>
+            </a:pPr>
+            <a:r>
+              <a:rPr lang="en-US" sz="1400" b="1" dirty="0">
+                <a:solidFill>
+                  <a:srgbClr val="1C3F6E"/>
+                </a:solidFill>
+                <a:latin typeface="Calibri" pitchFamily="34" charset="0"/>
+                <a:ea typeface="Calibri" pitchFamily="34" charset="-122"/>
+                <a:cs typeface="Calibri" pitchFamily="34" charset="-120"/>
+              </a:rPr>
+              <a:t>REFERENCES</a:t>
+            </a:r>
+            <a:endParaRPr lang="en-US" sz="1400" dirty="0"/>
+          </a:p>
+        </p:txBody>
+      </p:sp>
+      <p:pic>
+        <p:nvPicPr>
+          <p:cNvPr id="3" name="Image 0" descr="/home/claude/f4/img/minesec_sheet.png">    </p:cNvPr>
+          <p:cNvPicPr>
+            <a:picLocks noChangeAspect="1"/>
+          </p:cNvPicPr>
+          <p:nvPr/>
+        </p:nvPicPr>
+        <p:blipFill>
+          <a:blip r:embed="rId1"/>
+          <a:stretch>
+            <a:fillRect/>
+          </a:stretch>
+        </p:blipFill>
+        <p:spPr>
+          <a:xfrm>
+            <a:off x="0" y="658368"/>
+            <a:ext cx="1463040" cy="5833872"/>
+          </a:xfrm>
+          <a:prstGeom prst="rect">
+            <a:avLst/>
+          </a:prstGeom>
+        </p:spPr>
+      </p:pic>
+      <p:sp>
+        <p:nvSpPr>
+          <p:cNvPr id="4" name="Text 1"/>
+          <p:cNvSpPr/>
+          <p:nvPr/>
+        </p:nvSpPr>
+        <p:spPr>
+          <a:xfrm>
+            <a:off x="1691640" y="1005840"/>
+            <a:ext cx="10180015" cy="731520"/>
+          </a:xfrm>
+          <a:prstGeom prst="rect">
+            <a:avLst/>
+          </a:prstGeom>
+          <a:noFill/>
+          <a:ln/>
+        </p:spPr>
+        <p:txBody>
+          <a:bodyPr wrap="square" lIns="0" tIns="0" rIns="0" bIns="0" rtlCol="0" anchor="ctr">
+            <a:normAutofit/>
+          </a:bodyPr>
+          <a:lstStyle/>
+          <a:p>
+            <a:pPr algn="ctr" indent="0" marL="0">
+              <a:buNone/>
+            </a:pPr>
+            <a:r>
+              <a:rPr lang="en-US" sz="3600" b="1" dirty="0">
+                <a:solidFill>
+                  <a:srgbClr val="990011"/>
+                </a:solidFill>
+                <a:latin typeface="Times New Roman" pitchFamily="34" charset="0"/>
+                <a:ea typeface="Times New Roman" pitchFamily="34" charset="-122"/>
+                <a:cs typeface="Times New Roman" pitchFamily="34" charset="-120"/>
+              </a:rPr>
+              <a:t>References</a:t>
+            </a:r>
+            <a:endParaRPr lang="en-US" sz="3600" dirty="0"/>
+          </a:p>
+        </p:txBody>
+      </p:sp>
+      <p:sp>
+        <p:nvSpPr>
+          <p:cNvPr id="5" name="Text 2"/>
+          <p:cNvSpPr/>
+          <p:nvPr/>
+        </p:nvSpPr>
+        <p:spPr>
+          <a:xfrm>
+            <a:off x="1691640" y="1783080"/>
+            <a:ext cx="10180015" cy="4663440"/>
+          </a:xfrm>
+          <a:prstGeom prst="rect">
+            <a:avLst/>
+          </a:prstGeom>
+          <a:noFill/>
+          <a:ln/>
+        </p:spPr>
+        <p:txBody>
+          <a:bodyPr wrap="square" lIns="0" tIns="0" rIns="0" bIns="0" rtlCol="0" anchor="t"/>
+          <a:lstStyle/>
+          <a:p>
+            <a:pPr algn="l" marL="342900" indent="-342900">
+              <a:spcAft>
+                <a:spcPts val="800"/>
+              </a:spcAft>
+              <a:buSzPct val="100000"/>
+              <a:buChar char="•"/>
+            </a:pPr>
+            <a:r>
+              <a:rPr lang="en-US" sz="1800" dirty="0">
+                <a:solidFill>
+                  <a:srgbClr val="111111"/>
+                </a:solidFill>
+                <a:latin typeface="Calibri" pitchFamily="34" charset="0"/>
+                <a:ea typeface="Calibri" pitchFamily="34" charset="-122"/>
+                <a:cs typeface="Calibri" pitchFamily="34" charset="-120"/>
+              </a:rPr>
+              <a:t>Harmonised Progression Sheet, Economic Geography (5051), Form 2.</a:t>
+            </a:r>
+            <a:endParaRPr lang="en-US" sz="1800" dirty="0"/>
+          </a:p>
+          <a:p>
+            <a:pPr algn="l" marL="342900" indent="-342900">
+              <a:spcAft>
+                <a:spcPts val="800"/>
+              </a:spcAft>
+              <a:buSzPct val="100000"/>
+              <a:buChar char="•"/>
+            </a:pPr>
+            <a:r>
+              <a:rPr lang="en-US" sz="1800" dirty="0">
+                <a:solidFill>
+                  <a:srgbClr val="111111"/>
+                </a:solidFill>
+                <a:latin typeface="Calibri" pitchFamily="34" charset="0"/>
+                <a:ea typeface="Calibri" pitchFamily="34" charset="-122"/>
+                <a:cs typeface="Calibri" pitchFamily="34" charset="-120"/>
+              </a:rPr>
+              <a:t>Photo, Activity 1: “Lowell Massachusetts - Boott Cotton Mills Museum Weave Room” by Onasill ~ Bill- 81M views, CC BY-NC-SA 2.0, via Flickr (https://www.flickr.com/photos/7156765@N05/43677799854)</a:t>
+            </a:r>
+            <a:endParaRPr lang="en-US" sz="1800" dirty="0"/>
+          </a:p>
+          <a:p>
+            <a:pPr algn="l" marL="342900" indent="-342900">
+              <a:spcAft>
+                <a:spcPts val="800"/>
+              </a:spcAft>
+              <a:buSzPct val="100000"/>
+              <a:buChar char="•"/>
+            </a:pPr>
+            <a:r>
+              <a:rPr lang="en-US" sz="1800" dirty="0">
+                <a:solidFill>
+                  <a:srgbClr val="111111"/>
+                </a:solidFill>
+                <a:latin typeface="Calibri" pitchFamily="34" charset="0"/>
+                <a:ea typeface="Calibri" pitchFamily="34" charset="-122"/>
+                <a:cs typeface="Calibri" pitchFamily="34" charset="-120"/>
+              </a:rPr>
+              <a:t>Photo, Activity 2: “Interior of Winston-Salem Chero-Cola Bottling Company, Winston-Salem, ” by unclibraries_commons, Public domain 1.0, via Flickr (https://www.flickr.com/photos/122654055@N06/22680169228)</a:t>
+            </a:r>
+            <a:endParaRPr lang="en-US" sz="1800" dirty="0"/>
+          </a:p>
+          <a:p>
+            <a:pPr algn="l" marL="342900" indent="-342900">
+              <a:spcAft>
+                <a:spcPts val="800"/>
+              </a:spcAft>
+              <a:buSzPct val="100000"/>
+              <a:buChar char="•"/>
+            </a:pPr>
+            <a:r>
+              <a:rPr lang="en-US" sz="1800" dirty="0">
+                <a:solidFill>
+                  <a:srgbClr val="111111"/>
+                </a:solidFill>
+                <a:latin typeface="Calibri" pitchFamily="34" charset="0"/>
+                <a:ea typeface="Calibri" pitchFamily="34" charset="-122"/>
+                <a:cs typeface="Calibri" pitchFamily="34" charset="-120"/>
+              </a:rPr>
+              <a:t>Photo, Activity 3: “Kurri Kurri aluminium” by yewenyi, CC BY-NC 2.0, via Flickr (https://www.flickr.com/photos/30265340@N00/2971223932)</a:t>
+            </a:r>
+            <a:endParaRPr lang="en-US" sz="1800" dirty="0"/>
+          </a:p>
+          <a:p>
+            <a:pPr algn="l" marL="342900" indent="-342900">
+              <a:spcAft>
+                <a:spcPts val="800"/>
+              </a:spcAft>
+              <a:buSzPct val="100000"/>
+              <a:buChar char="•"/>
+            </a:pPr>
+            <a:r>
+              <a:rPr lang="en-US" sz="1800" dirty="0">
+                <a:solidFill>
+                  <a:srgbClr val="111111"/>
+                </a:solidFill>
+                <a:latin typeface="Calibri" pitchFamily="34" charset="0"/>
+                <a:ea typeface="Calibri" pitchFamily="34" charset="-122"/>
+                <a:cs typeface="Calibri" pitchFamily="34" charset="-120"/>
+              </a:rPr>
+              <a:t>Photo, Activity 4: “Cementing Ethiopia's progress” by DFID - UK Department for International Development, CC BY 2.0, via Flickr (https://www.flickr.com/photos/14214150@N02/8757865770)</a:t>
+            </a:r>
+            <a:endParaRPr lang="en-US" sz="1800" dirty="0"/>
+          </a:p>
+          <a:p>
+            <a:pPr algn="l" marL="342900" indent="-342900">
+              <a:spcAft>
+                <a:spcPts val="800"/>
+              </a:spcAft>
+              <a:buSzPct val="100000"/>
+              <a:buChar char="•"/>
+            </a:pPr>
+            <a:r>
+              <a:rPr lang="en-US" sz="1800" dirty="0">
+                <a:solidFill>
+                  <a:srgbClr val="111111"/>
+                </a:solidFill>
+                <a:latin typeface="Calibri" pitchFamily="34" charset="0"/>
+                <a:ea typeface="Calibri" pitchFamily="34" charset="-122"/>
+                <a:cs typeface="Calibri" pitchFamily="34" charset="-120"/>
+              </a:rPr>
+              <a:t>Photo, Activity 5: “Forging a new spear tip” by www.j-pics.info, CC BY-NC-SA 2.0, via Flickr (https://www.flickr.com/photos/33979630@N07/16024814824)</a:t>
+            </a:r>
+            <a:endParaRPr lang="en-US" sz="1800" dirty="0"/>
+          </a:p>
+          <a:p>
+            <a:pPr algn="l" marL="342900" indent="-342900">
+              <a:spcAft>
+                <a:spcPts val="800"/>
+              </a:spcAft>
+              <a:buSzPct val="100000"/>
+              <a:buChar char="•"/>
+            </a:pPr>
+            <a:r>
+              <a:rPr lang="en-US" sz="1800" dirty="0">
+                <a:solidFill>
+                  <a:srgbClr val="111111"/>
+                </a:solidFill>
+                <a:latin typeface="Calibri" pitchFamily="34" charset="0"/>
+                <a:ea typeface="Calibri" pitchFamily="34" charset="-122"/>
+                <a:cs typeface="Calibri" pitchFamily="34" charset="-120"/>
+              </a:rPr>
+              <a:t>Diagrams and animations: drawn for this lesson (Geography Department).</a:t>
+            </a:r>
+            <a:endParaRPr lang="en-US" sz="1800" dirty="0"/>
+          </a:p>
+        </p:txBody>
+      </p:sp>
+      <p:sp>
+        <p:nvSpPr>
+          <p:cNvPr id="25" name="Slide Number Placeholder 0"/>
+          <p:cNvSpPr>
+            <a:spLocks noGrp="1"/>
+          </p:cNvSpPr>
+          <p:nvPr>
+            <p:ph type="sldNum" sz="quarter" idx="4294967295"/>
+          </p:nvPr>
+        </p:nvSpPr>
+        <p:spPr>
+          <a:xfrm>
+            <a:off x="27432" y="91440"/>
+            <a:ext cx="585216" cy="475488"/>
+          </a:xfrm>
+          <a:prstGeom prst="rect">
+            <a:avLst/>
+          </a:prstGeom>
+          <a:extLst>
+            <a:ext uri="{C572A759-6A51-4108-AA02-DFA0A04FC94B}">
+              <ma14:wrappingTextBoxFlag xmlns:ma14="http://schemas.microsoft.com/office/mac/drawingml/2011/main" val="0"/>
+            </a:ext>
+          </a:extLst>
+        </p:spPr>
+        <p:txBody>
+          <a:bodyPr/>
+          <a:lstStyle>
+            <a:lvl1pPr>
+              <a:defRPr sz="2000">
+                <a:solidFill>
+                  <a:srgbClr val="FFFFFF"/>
+                </a:solidFill>
+                <a:latin typeface="Calibri"/>
+                <a:ea typeface="Calibri"/>
+                <a:cs typeface="Calibri"/>
+              </a:defRPr>
+            </a:lvl1pPr>
+          </a:lstStyle>
+          <a:p>
+            <a:pPr algn="ctr"/>
+            <a:fld id="{F7021451-1387-4CA6-816F-3879F97B5CBC}" type="slidenum">
+              <a:rPr b="1" lang="en-US"/>
+              <a:t>51</a:t>
+            </a:fld>
+            <a:endParaRPr lang="en-US"/>
+          </a:p>
+        </p:txBody>
+      </p:sp>
+    </p:spTree>
+  </p:cSld>
+  <p:clrMapOvr>
+    <a:masterClrMapping/>
+  </p:clrMapOvr>
+</p:sld>
+</file>
+
 <file path=ppt/slides/slide6.xml><?xml version="1.0" encoding="utf-8"?>
 <p:sld xmlns:a="http://schemas.openxmlformats.org/drawingml/2006/main" xmlns:r="http://schemas.openxmlformats.org/officeDocument/2006/relationships" xmlns:p="http://schemas.openxmlformats.org/presentationml/2006/main">
   <p:cSld name="Slide 6">
@@ -20468,7 +21463,7 @@
         <p:spPr>
           <a:xfrm>
             <a:off x="0" y="658368"/>
-            <a:ext cx="5120640" cy="5833872"/>
+            <a:ext cx="2468880" cy="5833872"/>
           </a:xfrm>
           <a:prstGeom prst="rect">
             <a:avLst/>
@@ -20483,8 +21478,8 @@
         </p:nvSpPr>
         <p:spPr>
           <a:xfrm>
-            <a:off x="5349240" y="1005840"/>
-            <a:ext cx="6522415" cy="731520"/>
+            <a:off x="2697480" y="1005840"/>
+            <a:ext cx="9174175" cy="731520"/>
           </a:xfrm>
           <a:prstGeom prst="rect">
             <a:avLst/>
@@ -20524,8 +21519,8 @@
         </p:nvSpPr>
         <p:spPr>
           <a:xfrm>
-            <a:off x="5349240" y="1783080"/>
-            <a:ext cx="6522415" cy="4663440"/>
+            <a:off x="2697480" y="1783080"/>
+            <a:ext cx="9174175" cy="4663440"/>
           </a:xfrm>
           <a:prstGeom prst="rect">
             <a:avLst/>
@@ -20552,7 +21547,7 @@
                 <a:ea typeface="Times New Roman" pitchFamily="34" charset="-122"/>
                 <a:cs typeface="Times New Roman" pitchFamily="34" charset="-120"/>
               </a:rPr>
-              <a:t>Cameroon sells raw cotton and cocoa beans at low prices. Later, it buys back clothes and chocolate made from them at high prices. Djibrilla wonders why.</a:t>
+              <a:t>Cameroon sells raw cotton and cocoa beans at low prices, and later buys back clothes and chocolate made from them at high prices. Djibrilla asks: "What do we call the work of changing raw materials into new goods, and why is it important?"</a:t>
             </a:r>
             <a:endParaRPr lang="en-US" sz="4000" dirty="0"/>
           </a:p>

--- a/lecons/F2T/23_S17_L5_P4_Secondary_Sector.pptx
+++ b/lecons/F2T/23_S17_L5_P4_Secondary_Sector.pptx
@@ -3456,7 +3456,7 @@
           <a:p>
             <a:r>
               <a:rPr lang="en-US" dirty="0"/>
-              <a:t>Before we start the new lesson, let us correct the homework I gave you at the end of Lesson 5 (Part 3): The Sectors of the Economy: The Primary Sector (Definition and Examples). The question was: Find the names of two factories in Cameroon, and write what each one produces. Take out your exercise books.</a:t>
+              <a:t>Before we start the new lesson, let us correct the homework I gave you at the end of Lesson 5 (Part 3): The Sectors of the Economy: The Primary Sector (Definition and Examples). The question was: Name one factory of Garoua and its product. Take out your exercise books.</a:t>
             </a:r>
             <a:endParaRPr lang="en-US" dirty="0"/>
           </a:p>
@@ -3984,7 +3984,7 @@
           <a:p>
             <a:r>
               <a:rPr lang="en-US" dirty="0"/>
-              <a:t>For your homework: List four services that your family uses every week, for example transport, school, hospital, market or mobile money. We shall correct it at the beginning of our next lesson.</a:t>
+              <a:t>For your homework: Give three services used every day. We shall correct it at the beginning of our next lesson.</a:t>
             </a:r>
             <a:endParaRPr lang="en-US" dirty="0"/>
           </a:p>
@@ -4424,7 +4424,7 @@
           <a:p>
             <a:r>
               <a:rPr lang="en-US" dirty="0"/>
-              <a:t>Here is a good answer. Examples: CICAM in Garoua makes cloth from cotton; SABC (Brasseries du Cameroun) makes drinks; Alucam in Edéa makes aluminium; CIMENCAM in Figuil makes cement. Compare it with your own answer and correct your work in red.</a:t>
+              <a:t>Here is a good answer. CICAM, which makes cloth. Compare it with your own answer and correct your work in red.</a:t>
             </a:r>
             <a:endParaRPr lang="en-US" dirty="0"/>
           </a:p>
@@ -14831,7 +14831,7 @@
         <p:spPr>
           <a:xfrm>
             <a:off x="0" y="658368"/>
-            <a:ext cx="3840480" cy="5833872"/>
+            <a:ext cx="5120640" cy="5833872"/>
           </a:xfrm>
           <a:prstGeom prst="rect">
             <a:avLst/>
@@ -14846,8 +14846,8 @@
         </p:nvSpPr>
         <p:spPr>
           <a:xfrm>
-            <a:off x="4069080" y="1005840"/>
-            <a:ext cx="7802575" cy="731520"/>
+            <a:off x="5349240" y="1005840"/>
+            <a:ext cx="6522415" cy="731520"/>
           </a:xfrm>
           <a:prstGeom prst="rect">
             <a:avLst/>
@@ -14887,8 +14887,8 @@
         </p:nvSpPr>
         <p:spPr>
           <a:xfrm>
-            <a:off x="4069080" y="1783080"/>
-            <a:ext cx="7802575" cy="4663440"/>
+            <a:off x="5349240" y="1783080"/>
+            <a:ext cx="6522415" cy="4663440"/>
           </a:xfrm>
           <a:prstGeom prst="rect">
             <a:avLst/>
@@ -14935,7 +14935,7 @@
                 <a:ea typeface="Times New Roman" pitchFamily="34" charset="-122"/>
                 <a:cs typeface="Times New Roman" pitchFamily="34" charset="-120"/>
               </a:rPr>
-              <a:t>Find the names of two factories in Cameroon, and write what each one produces.</a:t>
+              <a:t>Name one factory of Garoua and its product.</a:t>
             </a:r>
             <a:endParaRPr lang="en-US" sz="4000" dirty="0"/>
           </a:p>
@@ -16315,7 +16315,7 @@
                 <a:ea typeface="Times New Roman" pitchFamily="34" charset="-122"/>
                 <a:cs typeface="Times New Roman" pitchFamily="34" charset="-120"/>
               </a:rPr>
-              <a:t>List four services that your family uses every week, for example transport, school, hospital, market or mobile money.</a:t>
+              <a:t>Give three services used every day.</a:t>
             </a:r>
             <a:endParaRPr lang="en-US" sz="4000" dirty="0"/>
           </a:p>
@@ -19255,7 +19255,7 @@
                           <a:ea typeface="Calibri" pitchFamily="34" charset="-122"/>
                           <a:cs typeface="Calibri" pitchFamily="34" charset="-120"/>
                         </a:rPr>
-                        <a:t>List four services that your family uses every week, for example transport, school, hospital, market or mobile money.</a:t>
+                        <a:t>Give three services used every day.</a:t>
                       </a:r>
                       <a:endParaRPr lang="en-US" sz="1600" dirty="0">
                         <a:latin typeface="Calibri" charset="0"/>
@@ -19800,7 +19800,7 @@
                 <a:ea typeface="Times New Roman" pitchFamily="34" charset="-122"/>
                 <a:cs typeface="Times New Roman" pitchFamily="34" charset="-120"/>
               </a:rPr>
-              <a:t>Examples: CICAM in Garoua makes cloth from cotton; SABC (Brasseries du Cameroun) makes drinks; Alucam in Edéa makes aluminium; CIMENCAM in Figuil makes cement.</a:t>
+              <a:t>CICAM, which makes cloth.</a:t>
             </a:r>
             <a:endParaRPr lang="en-US" sz="4000" dirty="0"/>
           </a:p>
